--- a/session7/session7_full.pptx
+++ b/session7/session7_full.pptx
@@ -16,9 +16,10 @@
     <p:sldId id="261" r:id="rId12"/>
     <p:sldId id="262" r:id="rId7"/>
     <p:sldId id="263" r:id="rId6"/>
+    <p:sldId id="269" r:id="rId20"/>
+    <p:sldId id="271" r:id="rId22"/>
     <p:sldId id="264" r:id="rId5"/>
-    <p:sldId id="265" r:id="rId4"/>
-    <p:sldId id="266" r:id="rId3"/>
+    <p:sldId id="272" r:id="rId23"/>
     <p:sldId id="267" r:id="rId18"/>
     <p:sldId id="268" r:id="rId19"/>
   </p:sldIdLst>
@@ -903,7 +904,7 @@
                   <a:srgbClr val="CADCFC"/>
                 </a:solidFill>
               </a:rPr>
-              <a:t>● ● ● ● ● ● ● ○ ○ ○</a:t>
+              <a:t>● ● ● ● ● ● ● ○ ○ ○ ○</a:t>
             </a:r>
           </a:p>
         </p:txBody>
@@ -937,906 +938,6 @@
                 </a:solidFill>
               </a:rPr>
               <a:t>Koji</a:t>
-            </a:r>
-          </a:p>
-        </p:txBody>
-      </p:sp>
-    </p:spTree>
-  </p:cSld>
-  <p:clrMapOvr>
-    <a:masterClrMapping/>
-  </p:clrMapOvr>
-</p:sld>
-</file>
-
-<file path=ppt/slides/slide10.xml><?xml version="1.0" encoding="utf-8"?>
-<p:sld xmlns:a="http://schemas.openxmlformats.org/drawingml/2006/main" xmlns:p="http://schemas.openxmlformats.org/presentationml/2006/main" xmlns:r="http://schemas.openxmlformats.org/officeDocument/2006/relationships">
-  <p:cSld>
-    <p:bg>
-      <p:bgPr>
-        <a:solidFill>
-          <a:srgbClr val="FFFFFF"/>
-        </a:solidFill>
-        <a:effectLst/>
-      </p:bgPr>
-    </p:bg>
-    <p:spTree>
-      <p:nvGrpSpPr>
-        <p:cNvPr id="1" name=""/>
-        <p:cNvGrpSpPr/>
-        <p:nvPr/>
-      </p:nvGrpSpPr>
-      <p:grpSpPr/>
-      <p:sp>
-        <p:nvSpPr>
-          <p:cNvPr id="2" name="TextBox 1"/>
-          <p:cNvSpPr txBox="1"/>
-          <p:nvPr/>
-        </p:nvSpPr>
-        <p:spPr>
-          <a:xfrm>
-            <a:off x="457200" y="320040"/>
-            <a:ext cx="8229600" cy="548640"/>
-          </a:xfrm>
-          <a:prstGeom prst="rect">
-            <a:avLst/>
-          </a:prstGeom>
-          <a:noFill/>
-        </p:spPr>
-        <p:txBody>
-          <a:bodyPr wrap="square" lIns="0" rIns="0" tIns="0" bIns="0">
-            <a:spAutoFit/>
-          </a:bodyPr>
-          <a:lstStyle/>
-          <a:p>
-            <a:r>
-              <a:rPr sz="2400" b="1" i="0">
-                <a:solidFill>
-                  <a:srgbClr val="1E2761"/>
-                </a:solidFill>
-              </a:rPr>
-              <a:t>開発ワークフロー全体像 ― 全7回の知識が繋がる</a:t>
-            </a:r>
-          </a:p>
-        </p:txBody>
-      </p:sp>
-      <p:sp>
-        <p:nvSpPr>
-          <p:cNvPr id="3" name="TextBox 2"/>
-          <p:cNvSpPr txBox="1"/>
-          <p:nvPr/>
-        </p:nvSpPr>
-        <p:spPr>
-          <a:xfrm>
-            <a:off x="457200" y="960000"/>
-            <a:ext cx="8229600" cy="330000"/>
-          </a:xfrm>
-          <a:prstGeom prst="rect">
-            <a:avLst/>
-          </a:prstGeom>
-          <a:noFill/>
-        </p:spPr>
-        <p:txBody>
-          <a:bodyPr wrap="square" lIns="0" rIns="0" tIns="0" bIns="0">
-            <a:spAutoFit/>
-          </a:bodyPr>
-          <a:lstStyle/>
-          <a:p>
-            <a:r>
-              <a:rPr sz="1300" b="0" i="1">
-                <a:solidFill>
-                  <a:srgbClr val="64748B"/>
-                </a:solidFill>
-              </a:rPr>
-              <a:t>Claude Code は①〜⑤の全ステップに関わる。コードを書くのは②だけ</a:t>
-            </a:r>
-          </a:p>
-        </p:txBody>
-      </p:sp>
-      <p:sp>
-        <p:nvSpPr>
-          <p:cNvPr id="4" name="TextBox 3"/>
-          <p:cNvSpPr txBox="1"/>
-          <p:nvPr/>
-        </p:nvSpPr>
-        <p:spPr>
-          <a:xfrm>
-            <a:off x="362000" y="1500000"/>
-            <a:ext cx="1620000" cy="700000"/>
-          </a:xfrm>
-          <a:prstGeom prst="rect">
-            <a:avLst/>
-          </a:prstGeom>
-          <a:noFill/>
-        </p:spPr>
-        <p:txBody>
-          <a:bodyPr wrap="square" lIns="0" rIns="0" tIns="0" bIns="0">
-            <a:spAutoFit/>
-          </a:bodyPr>
-          <a:lstStyle/>
-          <a:p>
-            <a:pPr algn="ctr"/>
-            <a:r>
-              <a:rPr sz="1600" b="1" i="0">
-                <a:solidFill>
-                  <a:srgbClr val="1E2761"/>
-                </a:solidFill>
-              </a:rPr>
-              <a:t>①
-Issue/要件</a:t>
-            </a:r>
-          </a:p>
-        </p:txBody>
-      </p:sp>
-      <p:sp>
-        <p:nvSpPr>
-          <p:cNvPr id="5" name="TextBox 4"/>
-          <p:cNvSpPr txBox="1"/>
-          <p:nvPr/>
-        </p:nvSpPr>
-        <p:spPr>
-          <a:xfrm>
-            <a:off x="362000" y="2250000"/>
-            <a:ext cx="1620000" cy="1900000"/>
-          </a:xfrm>
-          <a:prstGeom prst="rect">
-            <a:avLst/>
-          </a:prstGeom>
-          <a:noFill/>
-        </p:spPr>
-        <p:txBody>
-          <a:bodyPr wrap="square" lIns="0" rIns="0" tIns="0" bIns="0">
-            <a:spAutoFit/>
-          </a:bodyPr>
-          <a:lstStyle/>
-          <a:p>
-            <a:pPr algn="ctr"/>
-            <a:r>
-              <a:rPr sz="1100" b="0" i="0">
-                <a:solidFill>
-                  <a:srgbClr val="2D3748"/>
-                </a:solidFill>
-              </a:rPr>
-              <a:t>SDD（5回）
-Plan Mode（本回）</a:t>
-            </a:r>
-          </a:p>
-        </p:txBody>
-      </p:sp>
-      <p:sp>
-        <p:nvSpPr>
-          <p:cNvPr id="6" name="TextBox 5"/>
-          <p:cNvSpPr txBox="1"/>
-          <p:nvPr/>
-        </p:nvSpPr>
-        <p:spPr>
-          <a:xfrm>
-            <a:off x="2062000" y="1500000"/>
-            <a:ext cx="1620000" cy="700000"/>
-          </a:xfrm>
-          <a:prstGeom prst="rect">
-            <a:avLst/>
-          </a:prstGeom>
-          <a:noFill/>
-        </p:spPr>
-        <p:txBody>
-          <a:bodyPr wrap="square" lIns="0" rIns="0" tIns="0" bIns="0">
-            <a:spAutoFit/>
-          </a:bodyPr>
-          <a:lstStyle/>
-          <a:p>
-            <a:pPr algn="ctr"/>
-            <a:r>
-              <a:rPr sz="1600" b="1" i="0">
-                <a:solidFill>
-                  <a:srgbClr val="1E2761"/>
-                </a:solidFill>
-              </a:rPr>
-              <a:t>②
-実装</a:t>
-            </a:r>
-          </a:p>
-        </p:txBody>
-      </p:sp>
-      <p:sp>
-        <p:nvSpPr>
-          <p:cNvPr id="7" name="TextBox 6"/>
-          <p:cNvSpPr txBox="1"/>
-          <p:nvPr/>
-        </p:nvSpPr>
-        <p:spPr>
-          <a:xfrm>
-            <a:off x="2062000" y="2250000"/>
-            <a:ext cx="1620000" cy="1900000"/>
-          </a:xfrm>
-          <a:prstGeom prst="rect">
-            <a:avLst/>
-          </a:prstGeom>
-          <a:noFill/>
-        </p:spPr>
-        <p:txBody>
-          <a:bodyPr wrap="square" lIns="0" rIns="0" tIns="0" bIns="0">
-            <a:spAutoFit/>
-          </a:bodyPr>
-          <a:lstStyle/>
-          <a:p>
-            <a:pPr algn="ctr"/>
-            <a:r>
-              <a:rPr sz="1100" b="0" i="0">
-                <a:solidFill>
-                  <a:srgbClr val="2D3748"/>
-                </a:solidFill>
-              </a:rPr>
-              <a:t>Skills（4・本回）
-SubAgents（本回）
-DevContainer（2回）</a:t>
-            </a:r>
-          </a:p>
-        </p:txBody>
-      </p:sp>
-      <p:sp>
-        <p:nvSpPr>
-          <p:cNvPr id="8" name="TextBox 7"/>
-          <p:cNvSpPr txBox="1"/>
-          <p:nvPr/>
-        </p:nvSpPr>
-        <p:spPr>
-          <a:xfrm>
-            <a:off x="3762000" y="1500000"/>
-            <a:ext cx="1620000" cy="700000"/>
-          </a:xfrm>
-          <a:prstGeom prst="rect">
-            <a:avLst/>
-          </a:prstGeom>
-          <a:noFill/>
-        </p:spPr>
-        <p:txBody>
-          <a:bodyPr wrap="square" lIns="0" rIns="0" tIns="0" bIns="0">
-            <a:spAutoFit/>
-          </a:bodyPr>
-          <a:lstStyle/>
-          <a:p>
-            <a:pPr algn="ctr"/>
-            <a:r>
-              <a:rPr sz="1600" b="1" i="0">
-                <a:solidFill>
-                  <a:srgbClr val="1E2761"/>
-                </a:solidFill>
-              </a:rPr>
-              <a:t>③
-レビュー</a:t>
-            </a:r>
-          </a:p>
-        </p:txBody>
-      </p:sp>
-      <p:sp>
-        <p:nvSpPr>
-          <p:cNvPr id="9" name="TextBox 8"/>
-          <p:cNvSpPr txBox="1"/>
-          <p:nvPr/>
-        </p:nvSpPr>
-        <p:spPr>
-          <a:xfrm>
-            <a:off x="3762000" y="2250000"/>
-            <a:ext cx="1620000" cy="1900000"/>
-          </a:xfrm>
-          <a:prstGeom prst="rect">
-            <a:avLst/>
-          </a:prstGeom>
-          <a:noFill/>
-        </p:spPr>
-        <p:txBody>
-          <a:bodyPr wrap="square" lIns="0" rIns="0" tIns="0" bIns="0">
-            <a:spAutoFit/>
-          </a:bodyPr>
-          <a:lstStyle/>
-          <a:p>
-            <a:pPr algn="ctr"/>
-            <a:r>
-              <a:rPr sz="1100" b="0" i="0">
-                <a:solidFill>
-                  <a:srgbClr val="2D3748"/>
-                </a:solidFill>
-              </a:rPr>
-              <a:t>Plan Mode
-Hooks（3回）
-Skill Creator</a:t>
-            </a:r>
-          </a:p>
-        </p:txBody>
-      </p:sp>
-      <p:sp>
-        <p:nvSpPr>
-          <p:cNvPr id="10" name="TextBox 9"/>
-          <p:cNvSpPr txBox="1"/>
-          <p:nvPr/>
-        </p:nvSpPr>
-        <p:spPr>
-          <a:xfrm>
-            <a:off x="5462000" y="1500000"/>
-            <a:ext cx="1620000" cy="700000"/>
-          </a:xfrm>
-          <a:prstGeom prst="rect">
-            <a:avLst/>
-          </a:prstGeom>
-          <a:noFill/>
-        </p:spPr>
-        <p:txBody>
-          <a:bodyPr wrap="square" lIns="0" rIns="0" tIns="0" bIns="0">
-            <a:spAutoFit/>
-          </a:bodyPr>
-          <a:lstStyle/>
-          <a:p>
-            <a:pPr algn="ctr"/>
-            <a:r>
-              <a:rPr sz="1600" b="1" i="0">
-                <a:solidFill>
-                  <a:srgbClr val="1E2761"/>
-                </a:solidFill>
-              </a:rPr>
-              <a:t>④
-マージ&amp;デプロイ</a:t>
-            </a:r>
-          </a:p>
-        </p:txBody>
-      </p:sp>
-      <p:sp>
-        <p:nvSpPr>
-          <p:cNvPr id="11" name="TextBox 10"/>
-          <p:cNvSpPr txBox="1"/>
-          <p:nvPr/>
-        </p:nvSpPr>
-        <p:spPr>
-          <a:xfrm>
-            <a:off x="5462000" y="2250000"/>
-            <a:ext cx="1620000" cy="1900000"/>
-          </a:xfrm>
-          <a:prstGeom prst="rect">
-            <a:avLst/>
-          </a:prstGeom>
-          <a:noFill/>
-        </p:spPr>
-        <p:txBody>
-          <a:bodyPr wrap="square" lIns="0" rIns="0" tIns="0" bIns="0">
-            <a:spAutoFit/>
-          </a:bodyPr>
-          <a:lstStyle/>
-          <a:p>
-            <a:pPr algn="ctr"/>
-            <a:r>
-              <a:rPr sz="1100" b="0" i="0">
-                <a:solidFill>
-                  <a:srgbClr val="2D3748"/>
-                </a:solidFill>
-              </a:rPr>
-              <a:t>Routines（本回）
-Prompt CMS（6回）</a:t>
-            </a:r>
-          </a:p>
-        </p:txBody>
-      </p:sp>
-      <p:sp>
-        <p:nvSpPr>
-          <p:cNvPr id="12" name="TextBox 11"/>
-          <p:cNvSpPr txBox="1"/>
-          <p:nvPr/>
-        </p:nvSpPr>
-        <p:spPr>
-          <a:xfrm>
-            <a:off x="7162000" y="1500000"/>
-            <a:ext cx="1620000" cy="700000"/>
-          </a:xfrm>
-          <a:prstGeom prst="rect">
-            <a:avLst/>
-          </a:prstGeom>
-          <a:noFill/>
-        </p:spPr>
-        <p:txBody>
-          <a:bodyPr wrap="square" lIns="0" rIns="0" tIns="0" bIns="0">
-            <a:spAutoFit/>
-          </a:bodyPr>
-          <a:lstStyle/>
-          <a:p>
-            <a:pPr algn="ctr"/>
-            <a:r>
-              <a:rPr sz="1600" b="1" i="0">
-                <a:solidFill>
-                  <a:srgbClr val="1E2761"/>
-                </a:solidFill>
-              </a:rPr>
-              <a:t>⑤
-運用&amp;改善</a:t>
-            </a:r>
-          </a:p>
-        </p:txBody>
-      </p:sp>
-      <p:sp>
-        <p:nvSpPr>
-          <p:cNvPr id="13" name="TextBox 12"/>
-          <p:cNvSpPr txBox="1"/>
-          <p:nvPr/>
-        </p:nvSpPr>
-        <p:spPr>
-          <a:xfrm>
-            <a:off x="7162000" y="2250000"/>
-            <a:ext cx="1620000" cy="1900000"/>
-          </a:xfrm>
-          <a:prstGeom prst="rect">
-            <a:avLst/>
-          </a:prstGeom>
-          <a:noFill/>
-        </p:spPr>
-        <p:txBody>
-          <a:bodyPr wrap="square" lIns="0" rIns="0" tIns="0" bIns="0">
-            <a:spAutoFit/>
-          </a:bodyPr>
-          <a:lstStyle/>
-          <a:p>
-            <a:pPr algn="ctr"/>
-            <a:r>
-              <a:rPr sz="1100" b="0" i="0">
-                <a:solidFill>
-                  <a:srgbClr val="2D3748"/>
-                </a:solidFill>
-              </a:rPr>
-              <a:t>Trace（6回）
-データ分析
-LLM-as-a-Judge</a:t>
-            </a:r>
-          </a:p>
-        </p:txBody>
-      </p:sp>
-      <p:sp>
-        <p:nvSpPr>
-          <p:cNvPr id="14" name="TextBox 13"/>
-          <p:cNvSpPr txBox="1"/>
-          <p:nvPr/>
-        </p:nvSpPr>
-        <p:spPr>
-          <a:xfrm>
-            <a:off x="457200" y="4350000"/>
-            <a:ext cx="8229600" cy="380000"/>
-          </a:xfrm>
-          <a:prstGeom prst="rect">
-            <a:avLst/>
-          </a:prstGeom>
-          <a:noFill/>
-        </p:spPr>
-        <p:txBody>
-          <a:bodyPr wrap="square" lIns="0" rIns="0" tIns="0" bIns="0">
-            <a:spAutoFit/>
-          </a:bodyPr>
-          <a:lstStyle/>
-          <a:p>
-            <a:r>
-              <a:rPr sz="1400" b="1" i="0">
-                <a:solidFill>
-                  <a:srgbClr val="1E2761"/>
-                </a:solidFill>
-              </a:rPr>
-              <a:t>★ これが「仕事の型を実装する」ということ ― コードを書くのは②だけ</a:t>
-            </a:r>
-          </a:p>
-        </p:txBody>
-      </p:sp>
-      <p:sp>
-        <p:nvSpPr>
-          <p:cNvPr id="15" name="TextBox 14"/>
-          <p:cNvSpPr txBox="1"/>
-          <p:nvPr/>
-        </p:nvSpPr>
-        <p:spPr>
-          <a:xfrm>
-            <a:off x="5486400" y="4828032"/>
-            <a:ext cx="3474720" cy="228600"/>
-          </a:xfrm>
-          <a:prstGeom prst="rect">
-            <a:avLst/>
-          </a:prstGeom>
-          <a:noFill/>
-        </p:spPr>
-        <p:txBody>
-          <a:bodyPr wrap="square" lIns="0" rIns="0" tIns="0" bIns="0">
-            <a:spAutoFit/>
-          </a:bodyPr>
-          <a:lstStyle/>
-          <a:p>
-            <a:r>
-              <a:rPr sz="1000" b="0" i="0">
-                <a:solidFill>
-                  <a:srgbClr val="64748B"/>
-                </a:solidFill>
-              </a:rPr>
-              <a:t>● ● ● ● ● ● ● ○ ○ ○</a:t>
-            </a:r>
-          </a:p>
-        </p:txBody>
-      </p:sp>
-    </p:spTree>
-  </p:cSld>
-  <p:clrMapOvr>
-    <a:masterClrMapping/>
-  </p:clrMapOvr>
-</p:sld>
-</file>
-
-<file path=ppt/slides/slide11.xml><?xml version="1.0" encoding="utf-8"?>
-<p:sld xmlns:a="http://schemas.openxmlformats.org/drawingml/2006/main" xmlns:p="http://schemas.openxmlformats.org/presentationml/2006/main" xmlns:r="http://schemas.openxmlformats.org/officeDocument/2006/relationships">
-  <p:cSld>
-    <p:bg>
-      <p:bgPr>
-        <a:solidFill>
-          <a:srgbClr val="1E2761"/>
-        </a:solidFill>
-        <a:effectLst/>
-      </p:bgPr>
-    </p:bg>
-    <p:spTree>
-      <p:nvGrpSpPr>
-        <p:cNvPr id="1" name=""/>
-        <p:cNvGrpSpPr/>
-        <p:nvPr/>
-      </p:nvGrpSpPr>
-      <p:grpSpPr/>
-      <p:sp>
-        <p:nvSpPr>
-          <p:cNvPr id="2" name="TextBox 1"/>
-          <p:cNvSpPr txBox="1"/>
-          <p:nvPr/>
-        </p:nvSpPr>
-        <p:spPr>
-          <a:xfrm>
-            <a:off x="457200" y="457200"/>
-            <a:ext cx="8229600" cy="365760"/>
-          </a:xfrm>
-          <a:prstGeom prst="rect">
-            <a:avLst/>
-          </a:prstGeom>
-          <a:noFill/>
-        </p:spPr>
-        <p:txBody>
-          <a:bodyPr wrap="square" lIns="0" rIns="0" tIns="0" bIns="0">
-            <a:spAutoFit/>
-          </a:bodyPr>
-          <a:lstStyle/>
-          <a:p>
-            <a:r>
-              <a:rPr sz="1300" b="0" i="0">
-                <a:solidFill>
-                  <a:srgbClr val="CADCFC"/>
-                </a:solidFill>
-              </a:rPr>
-              <a:t>D E M O</a:t>
-            </a:r>
-          </a:p>
-        </p:txBody>
-      </p:sp>
-      <p:sp>
-        <p:nvSpPr>
-          <p:cNvPr id="3" name="TextBox 2"/>
-          <p:cNvSpPr txBox="1"/>
-          <p:nvPr/>
-        </p:nvSpPr>
-        <p:spPr>
-          <a:xfrm>
-            <a:off x="457200" y="868680"/>
-            <a:ext cx="8229600" cy="457200"/>
-          </a:xfrm>
-          <a:prstGeom prst="rect">
-            <a:avLst/>
-          </a:prstGeom>
-          <a:noFill/>
-        </p:spPr>
-        <p:txBody>
-          <a:bodyPr wrap="square" lIns="0" rIns="0" tIns="0" bIns="0">
-            <a:spAutoFit/>
-          </a:bodyPr>
-          <a:lstStyle/>
-          <a:p>
-            <a:r>
-              <a:rPr sz="2800" b="1" i="0">
-                <a:solidFill>
-                  <a:srgbClr val="FFFFFF"/>
-                </a:solidFill>
-              </a:rPr>
-              <a:t>ここからは実演</a:t>
-            </a:r>
-          </a:p>
-        </p:txBody>
-      </p:sp>
-      <p:sp>
-        <p:nvSpPr>
-          <p:cNvPr id="4" name="TextBox 3"/>
-          <p:cNvSpPr txBox="1"/>
-          <p:nvPr/>
-        </p:nvSpPr>
-        <p:spPr>
-          <a:xfrm>
-            <a:off x="457200" y="1380000"/>
-            <a:ext cx="8229600" cy="330000"/>
-          </a:xfrm>
-          <a:prstGeom prst="rect">
-            <a:avLst/>
-          </a:prstGeom>
-          <a:noFill/>
-        </p:spPr>
-        <p:txBody>
-          <a:bodyPr wrap="square" lIns="0" rIns="0" tIns="0" bIns="0">
-            <a:spAutoFit/>
-          </a:bodyPr>
-          <a:lstStyle/>
-          <a:p>
-            <a:r>
-              <a:rPr sz="1400" b="0" i="0">
-                <a:solidFill>
-                  <a:srgbClr val="CADCFC"/>
-                </a:solidFill>
-              </a:rPr>
-              <a:t>コードベース探索 → バグ発見 → Issue登録 を Claude Code で一気に</a:t>
-            </a:r>
-          </a:p>
-        </p:txBody>
-      </p:sp>
-      <p:sp>
-        <p:nvSpPr>
-          <p:cNvPr id="5" name="TextBox 4"/>
-          <p:cNvSpPr txBox="1"/>
-          <p:nvPr/>
-        </p:nvSpPr>
-        <p:spPr>
-          <a:xfrm>
-            <a:off x="457200" y="1900000"/>
-            <a:ext cx="8229600" cy="350000"/>
-          </a:xfrm>
-          <a:prstGeom prst="rect">
-            <a:avLst/>
-          </a:prstGeom>
-          <a:noFill/>
-        </p:spPr>
-        <p:txBody>
-          <a:bodyPr wrap="square" lIns="0" rIns="0" tIns="0" bIns="0">
-            <a:spAutoFit/>
-          </a:bodyPr>
-          <a:lstStyle/>
-          <a:p>
-            <a:r>
-              <a:rPr sz="1400" b="1" i="0">
-                <a:solidFill>
-                  <a:srgbClr val="FFC800"/>
-                </a:solidFill>
-              </a:rPr>
-              <a:t>ステップ1（3分）  コードベース探索</a:t>
-            </a:r>
-          </a:p>
-        </p:txBody>
-      </p:sp>
-      <p:sp>
-        <p:nvSpPr>
-          <p:cNvPr id="6" name="TextBox 5"/>
-          <p:cNvSpPr txBox="1"/>
-          <p:nvPr/>
-        </p:nvSpPr>
-        <p:spPr>
-          <a:xfrm>
-            <a:off x="457200" y="2280000"/>
-            <a:ext cx="8229600" cy="400000"/>
-          </a:xfrm>
-          <a:prstGeom prst="rect">
-            <a:avLst/>
-          </a:prstGeom>
-          <a:noFill/>
-        </p:spPr>
-        <p:txBody>
-          <a:bodyPr wrap="square" lIns="0" rIns="0" tIns="0" bIns="0">
-            <a:spAutoFit/>
-          </a:bodyPr>
-          <a:lstStyle/>
-          <a:p>
-            <a:r>
-              <a:rPr sz="1200" b="0" i="0">
-                <a:solidFill>
-                  <a:srgbClr val="CADCFC"/>
-                </a:solidFill>
-              </a:rPr>
-              <a:t>claude を起動 → 全体像把握 → 関連コード特定 → Plan Mode で安全調査</a:t>
-            </a:r>
-          </a:p>
-        </p:txBody>
-      </p:sp>
-      <p:sp>
-        <p:nvSpPr>
-          <p:cNvPr id="7" name="TextBox 6"/>
-          <p:cNvSpPr txBox="1"/>
-          <p:nvPr/>
-        </p:nvSpPr>
-        <p:spPr>
-          <a:xfrm>
-            <a:off x="457200" y="2750000"/>
-            <a:ext cx="8229600" cy="350000"/>
-          </a:xfrm>
-          <a:prstGeom prst="rect">
-            <a:avLst/>
-          </a:prstGeom>
-          <a:noFill/>
-        </p:spPr>
-        <p:txBody>
-          <a:bodyPr wrap="square" lIns="0" rIns="0" tIns="0" bIns="0">
-            <a:spAutoFit/>
-          </a:bodyPr>
-          <a:lstStyle/>
-          <a:p>
-            <a:r>
-              <a:rPr sz="1400" b="1" i="0">
-                <a:solidFill>
-                  <a:srgbClr val="FFC800"/>
-                </a:solidFill>
-              </a:rPr>
-              <a:t>ステップ2（2分）  バグ / 改善点を発見</a:t>
-            </a:r>
-          </a:p>
-        </p:txBody>
-      </p:sp>
-      <p:sp>
-        <p:nvSpPr>
-          <p:cNvPr id="8" name="TextBox 7"/>
-          <p:cNvSpPr txBox="1"/>
-          <p:nvPr/>
-        </p:nvSpPr>
-        <p:spPr>
-          <a:xfrm>
-            <a:off x="457200" y="3130000"/>
-            <a:ext cx="8229600" cy="400000"/>
-          </a:xfrm>
-          <a:prstGeom prst="rect">
-            <a:avLst/>
-          </a:prstGeom>
-          <a:noFill/>
-        </p:spPr>
-        <p:txBody>
-          <a:bodyPr wrap="square" lIns="0" rIns="0" tIns="0" bIns="0">
-            <a:spAutoFit/>
-          </a:bodyPr>
-          <a:lstStyle/>
-          <a:p>
-            <a:r>
-              <a:rPr sz="1200" b="0" i="0">
-                <a:solidFill>
-                  <a:srgbClr val="CADCFC"/>
-                </a:solidFill>
-              </a:rPr>
-              <a:t>「improve error handling」 → 問題点 + 影響範囲を提示 → Issue化を判断</a:t>
-            </a:r>
-          </a:p>
-        </p:txBody>
-      </p:sp>
-      <p:sp>
-        <p:nvSpPr>
-          <p:cNvPr id="9" name="TextBox 8"/>
-          <p:cNvSpPr txBox="1"/>
-          <p:nvPr/>
-        </p:nvSpPr>
-        <p:spPr>
-          <a:xfrm>
-            <a:off x="457200" y="3600000"/>
-            <a:ext cx="8229600" cy="350000"/>
-          </a:xfrm>
-          <a:prstGeom prst="rect">
-            <a:avLst/>
-          </a:prstGeom>
-          <a:noFill/>
-        </p:spPr>
-        <p:txBody>
-          <a:bodyPr wrap="square" lIns="0" rIns="0" tIns="0" bIns="0">
-            <a:spAutoFit/>
-          </a:bodyPr>
-          <a:lstStyle/>
-          <a:p>
-            <a:r>
-              <a:rPr sz="1400" b="1" i="0">
-                <a:solidFill>
-                  <a:srgbClr val="FFC800"/>
-                </a:solidFill>
-              </a:rPr>
-              <a:t>ステップ3（3分）  Issue登録</a:t>
-            </a:r>
-          </a:p>
-        </p:txBody>
-      </p:sp>
-      <p:sp>
-        <p:nvSpPr>
-          <p:cNvPr id="10" name="TextBox 9"/>
-          <p:cNvSpPr txBox="1"/>
-          <p:nvPr/>
-        </p:nvSpPr>
-        <p:spPr>
-          <a:xfrm>
-            <a:off x="457200" y="3980000"/>
-            <a:ext cx="8229600" cy="400000"/>
-          </a:xfrm>
-          <a:prstGeom prst="rect">
-            <a:avLst/>
-          </a:prstGeom>
-          <a:noFill/>
-        </p:spPr>
-        <p:txBody>
-          <a:bodyPr wrap="square" lIns="0" rIns="0" tIns="0" bIns="0">
-            <a:spAutoFit/>
-          </a:bodyPr>
-          <a:lstStyle/>
-          <a:p>
-            <a:r>
-              <a:rPr sz="1200" b="0" i="0">
-                <a:solidFill>
-                  <a:srgbClr val="CADCFC"/>
-                </a:solidFill>
-              </a:rPr>
-              <a:t>「create a GitLab issue with reproduction steps」 → Claude Code が起票</a:t>
-            </a:r>
-          </a:p>
-        </p:txBody>
-      </p:sp>
-      <p:sp>
-        <p:nvSpPr>
-          <p:cNvPr id="11" name="TextBox 10"/>
-          <p:cNvSpPr txBox="1"/>
-          <p:nvPr/>
-        </p:nvSpPr>
-        <p:spPr>
-          <a:xfrm>
-            <a:off x="457200" y="4500000"/>
-            <a:ext cx="8229600" cy="320000"/>
-          </a:xfrm>
-          <a:prstGeom prst="rect">
-            <a:avLst/>
-          </a:prstGeom>
-          <a:noFill/>
-        </p:spPr>
-        <p:txBody>
-          <a:bodyPr wrap="square" lIns="0" rIns="0" tIns="0" bIns="0">
-            <a:spAutoFit/>
-          </a:bodyPr>
-          <a:lstStyle/>
-          <a:p>
-            <a:r>
-              <a:rPr sz="1200" b="1" i="0">
-                <a:solidFill>
-                  <a:srgbClr val="FFC800"/>
-                </a:solidFill>
-              </a:rPr>
-              <a:t>★ 見せたいのは「コードを読む → 問題を見つける → 記録する」がターミナル内で完結すること</a:t>
-            </a:r>
-          </a:p>
-        </p:txBody>
-      </p:sp>
-      <p:sp>
-        <p:nvSpPr>
-          <p:cNvPr id="12" name="TextBox 11"/>
-          <p:cNvSpPr txBox="1"/>
-          <p:nvPr/>
-        </p:nvSpPr>
-        <p:spPr>
-          <a:xfrm>
-            <a:off x="5486400" y="4828032"/>
-            <a:ext cx="3474720" cy="228600"/>
-          </a:xfrm>
-          <a:prstGeom prst="rect">
-            <a:avLst/>
-          </a:prstGeom>
-          <a:noFill/>
-        </p:spPr>
-        <p:txBody>
-          <a:bodyPr wrap="square" lIns="0" rIns="0" tIns="0" bIns="0">
-            <a:spAutoFit/>
-          </a:bodyPr>
-          <a:lstStyle/>
-          <a:p>
-            <a:r>
-              <a:rPr sz="1000" b="0" i="0">
-                <a:solidFill>
-                  <a:srgbClr val="CADCFC"/>
-                </a:solidFill>
-              </a:rPr>
-              <a:t>● ● ● ● ● ● ● ○ ○ ○</a:t>
             </a:r>
           </a:p>
         </p:txBody>
@@ -2327,7 +1428,7 @@
                   <a:srgbClr val="FFFFFF"/>
                 </a:solidFill>
               </a:rPr>
-              <a:t>次回 ― 第8回「Agent Teams」</a:t>
+              <a:t>次回 ― 第8回「自己改善エージェント」</a:t>
             </a:r>
           </a:p>
         </p:txBody>
@@ -2360,7 +1461,7 @@
                   <a:srgbClr val="FFC800"/>
                 </a:solidFill>
               </a:rPr>
-              <a:t>テーマ ▸ サブエージェント = 道具、Agent Teams = 組織。役割設計と評価がセット</a:t>
+              <a:t>テーマ ▸ 正解があれば毎日賢くなる ― 生成（書く役）と評価（採点する役）を分けて回す</a:t>
             </a:r>
           </a:p>
         </p:txBody>
@@ -2426,7 +1527,7 @@
                   <a:srgbClr val="CADCFC"/>
                 </a:solidFill>
               </a:rPr>
-              <a:t>●  Agent Teams のP2Pメッセージング</a:t>
+              <a:t>●  正解（教師データ）の定義</a:t>
             </a:r>
           </a:p>
         </p:txBody>
@@ -2459,7 +1560,7 @@
                   <a:srgbClr val="CADCFC"/>
                 </a:solidFill>
               </a:rPr>
-              <a:t>●  役割設計（FE / BE / Test 等）</a:t>
+              <a:t>●  生成と評価の分離（書く役 / 採点する役）</a:t>
             </a:r>
           </a:p>
         </p:txBody>
@@ -2492,7 +1593,7 @@
                   <a:srgbClr val="CADCFC"/>
                 </a:solidFill>
               </a:rPr>
-              <a:t>●  タスクリスト共有と自律的タスク選択</a:t>
+              <a:t>●  style_guide の学習機構と破綻を防ぐ4原則</a:t>
             </a:r>
           </a:p>
         </p:txBody>
@@ -2525,7 +1626,7 @@
                   <a:srgbClr val="CADCFC"/>
                 </a:solidFill>
               </a:rPr>
-              <a:t>●  コスト管理と使い分けの判断基準</a:t>
+              <a:t>●  成果：採点スコア 7 → 13 の推移</a:t>
             </a:r>
           </a:p>
         </p:txBody>
@@ -2558,7 +1659,7 @@
                   <a:srgbClr val="FFC800"/>
                 </a:solidFill>
               </a:rPr>
-              <a:t>実演  3役割のAgent Team構成例</a:t>
+              <a:t>形式 ▸ 実演なし（スライド＋質疑で30分）／実例は為替の朝レポート自動化</a:t>
             </a:r>
           </a:p>
         </p:txBody>
@@ -2591,7 +1692,3821 @@
                   <a:srgbClr val="CADCFC"/>
                 </a:solidFill>
               </a:rPr>
-              <a:t>● ● ● ● ● ● ● ● ○ ○</a:t>
+              <a:t>● ● ● ● ● ● ● ● ○ ○ ○</a:t>
+            </a:r>
+          </a:p>
+        </p:txBody>
+      </p:sp>
+    </p:spTree>
+  </p:cSld>
+  <p:clrMapOvr>
+    <a:masterClrMapping/>
+  </p:clrMapOvr>
+</p:sld>
+</file>
+
+<file path=ppt/slides/slide14.xml><?xml version="1.0" encoding="utf-8"?>
+<p:sld xmlns:a="http://schemas.openxmlformats.org/drawingml/2006/main" xmlns:p="http://schemas.openxmlformats.org/presentationml/2006/main" xmlns:r="http://schemas.openxmlformats.org/officeDocument/2006/relationships">
+  <p:cSld>
+    <p:bg>
+      <p:bgPr>
+        <a:solidFill>
+          <a:srgbClr val="FFFFFF"/>
+        </a:solidFill>
+        <a:effectLst/>
+      </p:bgPr>
+    </p:bg>
+    <p:spTree>
+      <p:nvGrpSpPr>
+        <p:cNvPr id="1" name=""/>
+        <p:cNvGrpSpPr/>
+        <p:nvPr/>
+      </p:nvGrpSpPr>
+      <p:grpSpPr/>
+      <p:sp>
+        <p:nvSpPr>
+          <p:cNvPr id="2" name="title"/>
+          <p:cNvSpPr txBox="1"/>
+          <p:nvPr/>
+        </p:nvSpPr>
+        <p:spPr>
+          <a:xfrm>
+            <a:off x="457200" y="320040"/>
+            <a:ext cx="8229600" cy="548640"/>
+          </a:xfrm>
+          <a:prstGeom prst="rect">
+            <a:avLst/>
+          </a:prstGeom>
+          <a:noFill/>
+        </p:spPr>
+        <p:txBody>
+          <a:bodyPr wrap="square" lIns="0" rIns="0" tIns="0" bIns="0">
+            <a:spAutoFit/>
+          </a:bodyPr>
+          <a:lstStyle/>
+          <a:p>
+            <a:r>
+              <a:rPr lang="ja-JP" sz="2400" b="1" i="0">
+                <a:solidFill>
+                  <a:srgbClr val="1E2761"/>
+                </a:solidFill>
+              </a:rPr>
+              <a:t>Skill の8つの型 ― 全体マップ</a:t>
+            </a:r>
+          </a:p>
+        </p:txBody>
+      </p:sp>
+      <p:sp>
+        <p:nvSpPr>
+          <p:cNvPr id="3" name="sub"/>
+          <p:cNvSpPr txBox="1"/>
+          <p:nvPr/>
+        </p:nvSpPr>
+        <p:spPr>
+          <a:xfrm>
+            <a:off x="457200" y="960000"/>
+            <a:ext cx="8229600" cy="330000"/>
+          </a:xfrm>
+          <a:prstGeom prst="rect">
+            <a:avLst/>
+          </a:prstGeom>
+          <a:noFill/>
+        </p:spPr>
+        <p:txBody>
+          <a:bodyPr wrap="square" lIns="0" rIns="0" tIns="0" bIns="0">
+            <a:spAutoFit/>
+          </a:bodyPr>
+          <a:lstStyle/>
+          <a:p>
+            <a:r>
+              <a:rPr lang="ja-JP" sz="1300" b="0" i="1">
+                <a:solidFill>
+                  <a:srgbClr val="64748B"/>
+                </a:solidFill>
+              </a:rPr>
+              <a:t>2つは公式が「型」と呼ぶもの、残り6つは公式の機能・パターンを役割で整理したもの</a:t>
+            </a:r>
+          </a:p>
+        </p:txBody>
+      </p:sp>
+      <p:graphicFrame>
+        <p:nvGraphicFramePr>
+          <p:cNvPr id="20" name="Table"/>
+          <p:cNvGraphicFramePr/>
+          <p:nvPr/>
+        </p:nvGraphicFramePr>
+        <p:xfrm>
+          <a:off x="457200" y="1330000"/>
+          <a:ext cx="8229600" cy="100000"/>
+        </p:xfrm>
+        <a:graphic>
+          <a:graphicData uri="http://schemas.openxmlformats.org/drawingml/2006/table">
+            <a:tbl>
+              <a:tblPr firstRow="1" bandRow="0"/>
+              <a:tblGrid>
+                <a:gridCol w="1500000"/>
+                <a:gridCol w="2400000"/>
+                <a:gridCol w="2329600"/>
+                <a:gridCol w="2000000"/>
+              </a:tblGrid>
+              <a:tr h="315000">
+                <a:tc>
+                  <a:txBody>
+                    <a:bodyPr/>
+                    <a:lstStyle/>
+                    <a:p>
+                      <a:pPr algn="l"/>
+                      <a:r>
+                        <a:rPr lang="ja-JP" sz="1000" b="1" i="0">
+                          <a:solidFill>
+                            <a:srgbClr val="FFFFFF"/>
+                          </a:solidFill>
+                        </a:rPr>
+                        <a:t>型</a:t>
+                      </a:r>
+                    </a:p>
+                  </a:txBody>
+                  <a:tcPr marL="73152" marR="73152" marT="13000" marB="13000" anchor="ctr">
+                    <a:lnL w="6350">
+                      <a:solidFill>
+                        <a:srgbClr val="CBD5E1"/>
+                      </a:solidFill>
+                    </a:lnL>
+                    <a:lnR w="6350">
+                      <a:solidFill>
+                        <a:srgbClr val="CBD5E1"/>
+                      </a:solidFill>
+                    </a:lnR>
+                    <a:lnT w="6350">
+                      <a:solidFill>
+                        <a:srgbClr val="CBD5E1"/>
+                      </a:solidFill>
+                    </a:lnT>
+                    <a:lnB w="6350">
+                      <a:solidFill>
+                        <a:srgbClr val="CBD5E1"/>
+                      </a:solidFill>
+                    </a:lnB>
+                    <a:solidFill>
+                      <a:srgbClr val="1E2761"/>
+                    </a:solidFill>
+                  </a:tcPr>
+                </a:tc>
+                <a:tc>
+                  <a:txBody>
+                    <a:bodyPr/>
+                    <a:lstStyle/>
+                    <a:p>
+                      <a:pPr algn="l"/>
+                      <a:r>
+                        <a:rPr lang="ja-JP" sz="1000" b="1" i="0">
+                          <a:solidFill>
+                            <a:srgbClr val="FFFFFF"/>
+                          </a:solidFill>
+                        </a:rPr>
+                        <a:t>役割</a:t>
+                      </a:r>
+                    </a:p>
+                  </a:txBody>
+                  <a:tcPr marL="73152" marR="73152" marT="13000" marB="13000" anchor="ctr">
+                    <a:lnL w="6350">
+                      <a:solidFill>
+                        <a:srgbClr val="CBD5E1"/>
+                      </a:solidFill>
+                    </a:lnL>
+                    <a:lnR w="6350">
+                      <a:solidFill>
+                        <a:srgbClr val="CBD5E1"/>
+                      </a:solidFill>
+                    </a:lnR>
+                    <a:lnT w="6350">
+                      <a:solidFill>
+                        <a:srgbClr val="CBD5E1"/>
+                      </a:solidFill>
+                    </a:lnT>
+                    <a:lnB w="6350">
+                      <a:solidFill>
+                        <a:srgbClr val="CBD5E1"/>
+                      </a:solidFill>
+                    </a:lnB>
+                    <a:solidFill>
+                      <a:srgbClr val="1E2761"/>
+                    </a:solidFill>
+                  </a:tcPr>
+                </a:tc>
+                <a:tc>
+                  <a:txBody>
+                    <a:bodyPr/>
+                    <a:lstStyle/>
+                    <a:p>
+                      <a:pPr algn="l"/>
+                      <a:r>
+                        <a:rPr lang="ja-JP" sz="1000" b="1" i="0">
+                          <a:solidFill>
+                            <a:srgbClr val="FFFFFF"/>
+                          </a:solidFill>
+                        </a:rPr>
+                        <a:t>起動・設定</a:t>
+                      </a:r>
+                    </a:p>
+                  </a:txBody>
+                  <a:tcPr marL="73152" marR="73152" marT="13000" marB="13000" anchor="ctr">
+                    <a:lnL w="6350">
+                      <a:solidFill>
+                        <a:srgbClr val="CBD5E1"/>
+                      </a:solidFill>
+                    </a:lnL>
+                    <a:lnR w="6350">
+                      <a:solidFill>
+                        <a:srgbClr val="CBD5E1"/>
+                      </a:solidFill>
+                    </a:lnR>
+                    <a:lnT w="6350">
+                      <a:solidFill>
+                        <a:srgbClr val="CBD5E1"/>
+                      </a:solidFill>
+                    </a:lnT>
+                    <a:lnB w="6350">
+                      <a:solidFill>
+                        <a:srgbClr val="CBD5E1"/>
+                      </a:solidFill>
+                    </a:lnB>
+                    <a:solidFill>
+                      <a:srgbClr val="1E2761"/>
+                    </a:solidFill>
+                  </a:tcPr>
+                </a:tc>
+                <a:tc>
+                  <a:txBody>
+                    <a:bodyPr/>
+                    <a:lstStyle/>
+                    <a:p>
+                      <a:pPr algn="l"/>
+                      <a:r>
+                        <a:rPr lang="ja-JP" sz="1000" b="1" i="0">
+                          <a:solidFill>
+                            <a:srgbClr val="FFFFFF"/>
+                          </a:solidFill>
+                        </a:rPr>
+                        <a:t>最小例</a:t>
+                      </a:r>
+                    </a:p>
+                  </a:txBody>
+                  <a:tcPr marL="73152" marR="73152" marT="13000" marB="13000" anchor="ctr">
+                    <a:lnL w="6350">
+                      <a:solidFill>
+                        <a:srgbClr val="CBD5E1"/>
+                      </a:solidFill>
+                    </a:lnL>
+                    <a:lnR w="6350">
+                      <a:solidFill>
+                        <a:srgbClr val="CBD5E1"/>
+                      </a:solidFill>
+                    </a:lnR>
+                    <a:lnT w="6350">
+                      <a:solidFill>
+                        <a:srgbClr val="CBD5E1"/>
+                      </a:solidFill>
+                    </a:lnT>
+                    <a:lnB w="6350">
+                      <a:solidFill>
+                        <a:srgbClr val="CBD5E1"/>
+                      </a:solidFill>
+                    </a:lnB>
+                    <a:solidFill>
+                      <a:srgbClr val="1E2761"/>
+                    </a:solidFill>
+                  </a:tcPr>
+                </a:tc>
+              </a:tr>
+              <a:tr h="330000">
+                <a:tc>
+                  <a:txBody>
+                    <a:bodyPr/>
+                    <a:lstStyle/>
+                    <a:p>
+                      <a:pPr algn="l"/>
+                      <a:r>
+                        <a:rPr lang="ja-JP" sz="950" b="1" i="0">
+                          <a:solidFill>
+                            <a:srgbClr val="1E2761"/>
+                          </a:solidFill>
+                        </a:rPr>
+                        <a:t>Reference 参照</a:t>
+                      </a:r>
+                    </a:p>
+                  </a:txBody>
+                  <a:tcPr marL="73152" marR="73152" marT="13000" marB="13000" anchor="ctr">
+                    <a:lnL w="6350">
+                      <a:solidFill>
+                        <a:srgbClr val="CBD5E1"/>
+                      </a:solidFill>
+                    </a:lnL>
+                    <a:lnR w="6350">
+                      <a:solidFill>
+                        <a:srgbClr val="CBD5E1"/>
+                      </a:solidFill>
+                    </a:lnR>
+                    <a:lnT w="6350">
+                      <a:solidFill>
+                        <a:srgbClr val="CBD5E1"/>
+                      </a:solidFill>
+                    </a:lnT>
+                    <a:lnB w="6350">
+                      <a:solidFill>
+                        <a:srgbClr val="CBD5E1"/>
+                      </a:solidFill>
+                    </a:lnB>
+                    <a:solidFill>
+                      <a:srgbClr val="FFFFFF"/>
+                    </a:solidFill>
+                  </a:tcPr>
+                </a:tc>
+                <a:tc>
+                  <a:txBody>
+                    <a:bodyPr/>
+                    <a:lstStyle/>
+                    <a:p>
+                      <a:pPr algn="l"/>
+                      <a:r>
+                        <a:rPr lang="ja-JP" sz="950" b="0" i="0">
+                          <a:solidFill>
+                            <a:srgbClr val="2D3748"/>
+                          </a:solidFill>
+                        </a:rPr>
+                        <a:t>規約・ドメイン知識を注入</a:t>
+                      </a:r>
+                    </a:p>
+                  </a:txBody>
+                  <a:tcPr marL="73152" marR="73152" marT="13000" marB="13000" anchor="ctr">
+                    <a:lnL w="6350">
+                      <a:solidFill>
+                        <a:srgbClr val="CBD5E1"/>
+                      </a:solidFill>
+                    </a:lnL>
+                    <a:lnR w="6350">
+                      <a:solidFill>
+                        <a:srgbClr val="CBD5E1"/>
+                      </a:solidFill>
+                    </a:lnR>
+                    <a:lnT w="6350">
+                      <a:solidFill>
+                        <a:srgbClr val="CBD5E1"/>
+                      </a:solidFill>
+                    </a:lnT>
+                    <a:lnB w="6350">
+                      <a:solidFill>
+                        <a:srgbClr val="CBD5E1"/>
+                      </a:solidFill>
+                    </a:lnB>
+                    <a:solidFill>
+                      <a:srgbClr val="FFFFFF"/>
+                    </a:solidFill>
+                  </a:tcPr>
+                </a:tc>
+                <a:tc>
+                  <a:txBody>
+                    <a:bodyPr/>
+                    <a:lstStyle/>
+                    <a:p>
+                      <a:pPr algn="l"/>
+                      <a:r>
+                        <a:rPr lang="ja-JP" sz="950" b="0" i="0">
+                          <a:solidFill>
+                            <a:srgbClr val="2D3748"/>
+                          </a:solidFill>
+                        </a:rPr>
+                        <a:t>自動ロード</a:t>
+                      </a:r>
+                    </a:p>
+                  </a:txBody>
+                  <a:tcPr marL="73152" marR="73152" marT="13000" marB="13000" anchor="ctr">
+                    <a:lnL w="6350">
+                      <a:solidFill>
+                        <a:srgbClr val="CBD5E1"/>
+                      </a:solidFill>
+                    </a:lnL>
+                    <a:lnR w="6350">
+                      <a:solidFill>
+                        <a:srgbClr val="CBD5E1"/>
+                      </a:solidFill>
+                    </a:lnR>
+                    <a:lnT w="6350">
+                      <a:solidFill>
+                        <a:srgbClr val="CBD5E1"/>
+                      </a:solidFill>
+                    </a:lnT>
+                    <a:lnB w="6350">
+                      <a:solidFill>
+                        <a:srgbClr val="CBD5E1"/>
+                      </a:solidFill>
+                    </a:lnB>
+                    <a:solidFill>
+                      <a:srgbClr val="FFFFFF"/>
+                    </a:solidFill>
+                  </a:tcPr>
+                </a:tc>
+                <a:tc>
+                  <a:txBody>
+                    <a:bodyPr/>
+                    <a:lstStyle/>
+                    <a:p>
+                      <a:pPr algn="l"/>
+                      <a:r>
+                        <a:rPr lang="ja-JP" sz="950" b="0" i="0">
+                          <a:solidFill>
+                            <a:srgbClr val="2D3748"/>
+                          </a:solidFill>
+                        </a:rPr>
+                        <a:t>api-conventions</a:t>
+                      </a:r>
+                    </a:p>
+                  </a:txBody>
+                  <a:tcPr marL="73152" marR="73152" marT="13000" marB="13000" anchor="ctr">
+                    <a:lnL w="6350">
+                      <a:solidFill>
+                        <a:srgbClr val="CBD5E1"/>
+                      </a:solidFill>
+                    </a:lnL>
+                    <a:lnR w="6350">
+                      <a:solidFill>
+                        <a:srgbClr val="CBD5E1"/>
+                      </a:solidFill>
+                    </a:lnR>
+                    <a:lnT w="6350">
+                      <a:solidFill>
+                        <a:srgbClr val="CBD5E1"/>
+                      </a:solidFill>
+                    </a:lnT>
+                    <a:lnB w="6350">
+                      <a:solidFill>
+                        <a:srgbClr val="CBD5E1"/>
+                      </a:solidFill>
+                    </a:lnB>
+                    <a:solidFill>
+                      <a:srgbClr val="FFFFFF"/>
+                    </a:solidFill>
+                  </a:tcPr>
+                </a:tc>
+              </a:tr>
+              <a:tr h="330000">
+                <a:tc>
+                  <a:txBody>
+                    <a:bodyPr/>
+                    <a:lstStyle/>
+                    <a:p>
+                      <a:pPr algn="l"/>
+                      <a:r>
+                        <a:rPr lang="ja-JP" sz="950" b="1" i="0">
+                          <a:solidFill>
+                            <a:srgbClr val="1E2761"/>
+                          </a:solidFill>
+                        </a:rPr>
+                        <a:t>Task タスク実行</a:t>
+                      </a:r>
+                    </a:p>
+                  </a:txBody>
+                  <a:tcPr marL="73152" marR="73152" marT="13000" marB="13000" anchor="ctr">
+                    <a:lnL w="6350">
+                      <a:solidFill>
+                        <a:srgbClr val="CBD5E1"/>
+                      </a:solidFill>
+                    </a:lnL>
+                    <a:lnR w="6350">
+                      <a:solidFill>
+                        <a:srgbClr val="CBD5E1"/>
+                      </a:solidFill>
+                    </a:lnR>
+                    <a:lnT w="6350">
+                      <a:solidFill>
+                        <a:srgbClr val="CBD5E1"/>
+                      </a:solidFill>
+                    </a:lnT>
+                    <a:lnB w="6350">
+                      <a:solidFill>
+                        <a:srgbClr val="CBD5E1"/>
+                      </a:solidFill>
+                    </a:lnB>
+                    <a:solidFill>
+                      <a:srgbClr val="F1F5F9"/>
+                    </a:solidFill>
+                  </a:tcPr>
+                </a:tc>
+                <a:tc>
+                  <a:txBody>
+                    <a:bodyPr/>
+                    <a:lstStyle/>
+                    <a:p>
+                      <a:pPr algn="l"/>
+                      <a:r>
+                        <a:rPr lang="ja-JP" sz="950" b="0" i="0">
+                          <a:solidFill>
+                            <a:srgbClr val="2D3748"/>
+                          </a:solidFill>
+                        </a:rPr>
+                        <a:t>手順アクションを実行</a:t>
+                      </a:r>
+                    </a:p>
+                  </a:txBody>
+                  <a:tcPr marL="73152" marR="73152" marT="13000" marB="13000" anchor="ctr">
+                    <a:lnL w="6350">
+                      <a:solidFill>
+                        <a:srgbClr val="CBD5E1"/>
+                      </a:solidFill>
+                    </a:lnL>
+                    <a:lnR w="6350">
+                      <a:solidFill>
+                        <a:srgbClr val="CBD5E1"/>
+                      </a:solidFill>
+                    </a:lnR>
+                    <a:lnT w="6350">
+                      <a:solidFill>
+                        <a:srgbClr val="CBD5E1"/>
+                      </a:solidFill>
+                    </a:lnT>
+                    <a:lnB w="6350">
+                      <a:solidFill>
+                        <a:srgbClr val="CBD5E1"/>
+                      </a:solidFill>
+                    </a:lnB>
+                    <a:solidFill>
+                      <a:srgbClr val="F1F5F9"/>
+                    </a:solidFill>
+                  </a:tcPr>
+                </a:tc>
+                <a:tc>
+                  <a:txBody>
+                    <a:bodyPr/>
+                    <a:lstStyle/>
+                    <a:p>
+                      <a:pPr algn="l"/>
+                      <a:r>
+                        <a:rPr lang="ja-JP" sz="950" b="0" i="0">
+                          <a:solidFill>
+                            <a:srgbClr val="2D3748"/>
+                          </a:solidFill>
+                        </a:rPr>
+                        <a:t>/name で手動起動</a:t>
+                      </a:r>
+                    </a:p>
+                  </a:txBody>
+                  <a:tcPr marL="73152" marR="73152" marT="13000" marB="13000" anchor="ctr">
+                    <a:lnL w="6350">
+                      <a:solidFill>
+                        <a:srgbClr val="CBD5E1"/>
+                      </a:solidFill>
+                    </a:lnL>
+                    <a:lnR w="6350">
+                      <a:solidFill>
+                        <a:srgbClr val="CBD5E1"/>
+                      </a:solidFill>
+                    </a:lnR>
+                    <a:lnT w="6350">
+                      <a:solidFill>
+                        <a:srgbClr val="CBD5E1"/>
+                      </a:solidFill>
+                    </a:lnT>
+                    <a:lnB w="6350">
+                      <a:solidFill>
+                        <a:srgbClr val="CBD5E1"/>
+                      </a:solidFill>
+                    </a:lnB>
+                    <a:solidFill>
+                      <a:srgbClr val="F1F5F9"/>
+                    </a:solidFill>
+                  </a:tcPr>
+                </a:tc>
+                <a:tc>
+                  <a:txBody>
+                    <a:bodyPr/>
+                    <a:lstStyle/>
+                    <a:p>
+                      <a:pPr algn="l"/>
+                      <a:r>
+                        <a:rPr lang="ja-JP" sz="950" b="0" i="0">
+                          <a:solidFill>
+                            <a:srgbClr val="2D3748"/>
+                          </a:solidFill>
+                        </a:rPr>
+                        <a:t>deploy / fix-issue</a:t>
+                      </a:r>
+                    </a:p>
+                  </a:txBody>
+                  <a:tcPr marL="73152" marR="73152" marT="13000" marB="13000" anchor="ctr">
+                    <a:lnL w="6350">
+                      <a:solidFill>
+                        <a:srgbClr val="CBD5E1"/>
+                      </a:solidFill>
+                    </a:lnL>
+                    <a:lnR w="6350">
+                      <a:solidFill>
+                        <a:srgbClr val="CBD5E1"/>
+                      </a:solidFill>
+                    </a:lnR>
+                    <a:lnT w="6350">
+                      <a:solidFill>
+                        <a:srgbClr val="CBD5E1"/>
+                      </a:solidFill>
+                    </a:lnT>
+                    <a:lnB w="6350">
+                      <a:solidFill>
+                        <a:srgbClr val="CBD5E1"/>
+                      </a:solidFill>
+                    </a:lnB>
+                    <a:solidFill>
+                      <a:srgbClr val="F1F5F9"/>
+                    </a:solidFill>
+                  </a:tcPr>
+                </a:tc>
+              </a:tr>
+              <a:tr h="330000">
+                <a:tc>
+                  <a:txBody>
+                    <a:bodyPr/>
+                    <a:lstStyle/>
+                    <a:p>
+                      <a:pPr algn="l"/>
+                      <a:r>
+                        <a:rPr lang="ja-JP" sz="950" b="1" i="0">
+                          <a:solidFill>
+                            <a:srgbClr val="1E2761"/>
+                          </a:solidFill>
+                        </a:rPr>
+                        <a:t>Document 文書操作</a:t>
+                      </a:r>
+                    </a:p>
+                  </a:txBody>
+                  <a:tcPr marL="73152" marR="73152" marT="13000" marB="13000" anchor="ctr">
+                    <a:lnL w="6350">
+                      <a:solidFill>
+                        <a:srgbClr val="CBD5E1"/>
+                      </a:solidFill>
+                    </a:lnL>
+                    <a:lnR w="6350">
+                      <a:solidFill>
+                        <a:srgbClr val="CBD5E1"/>
+                      </a:solidFill>
+                    </a:lnR>
+                    <a:lnT w="6350">
+                      <a:solidFill>
+                        <a:srgbClr val="CBD5E1"/>
+                      </a:solidFill>
+                    </a:lnT>
+                    <a:lnB w="6350">
+                      <a:solidFill>
+                        <a:srgbClr val="CBD5E1"/>
+                      </a:solidFill>
+                    </a:lnB>
+                    <a:solidFill>
+                      <a:srgbClr val="FFFFFF"/>
+                    </a:solidFill>
+                  </a:tcPr>
+                </a:tc>
+                <a:tc>
+                  <a:txBody>
+                    <a:bodyPr/>
+                    <a:lstStyle/>
+                    <a:p>
+                      <a:pPr algn="l"/>
+                      <a:r>
+                        <a:rPr lang="ja-JP" sz="950" b="0" i="0">
+                          <a:solidFill>
+                            <a:srgbClr val="2D3748"/>
+                          </a:solidFill>
+                        </a:rPr>
+                        <a:t>docx/pdf/pptx/xlsx を生成・編集</a:t>
+                      </a:r>
+                    </a:p>
+                  </a:txBody>
+                  <a:tcPr marL="73152" marR="73152" marT="13000" marB="13000" anchor="ctr">
+                    <a:lnL w="6350">
+                      <a:solidFill>
+                        <a:srgbClr val="CBD5E1"/>
+                      </a:solidFill>
+                    </a:lnL>
+                    <a:lnR w="6350">
+                      <a:solidFill>
+                        <a:srgbClr val="CBD5E1"/>
+                      </a:solidFill>
+                    </a:lnR>
+                    <a:lnT w="6350">
+                      <a:solidFill>
+                        <a:srgbClr val="CBD5E1"/>
+                      </a:solidFill>
+                    </a:lnT>
+                    <a:lnB w="6350">
+                      <a:solidFill>
+                        <a:srgbClr val="CBD5E1"/>
+                      </a:solidFill>
+                    </a:lnB>
+                    <a:solidFill>
+                      <a:srgbClr val="FFFFFF"/>
+                    </a:solidFill>
+                  </a:tcPr>
+                </a:tc>
+                <a:tc>
+                  <a:txBody>
+                    <a:bodyPr/>
+                    <a:lstStyle/>
+                    <a:p>
+                      <a:pPr algn="l"/>
+                      <a:r>
+                        <a:rPr lang="ja-JP" sz="950" b="0" i="0">
+                          <a:solidFill>
+                            <a:srgbClr val="2D3748"/>
+                          </a:solidFill>
+                        </a:rPr>
+                        <a:t>pre-built（自動）</a:t>
+                      </a:r>
+                    </a:p>
+                  </a:txBody>
+                  <a:tcPr marL="73152" marR="73152" marT="13000" marB="13000" anchor="ctr">
+                    <a:lnL w="6350">
+                      <a:solidFill>
+                        <a:srgbClr val="CBD5E1"/>
+                      </a:solidFill>
+                    </a:lnL>
+                    <a:lnR w="6350">
+                      <a:solidFill>
+                        <a:srgbClr val="CBD5E1"/>
+                      </a:solidFill>
+                    </a:lnR>
+                    <a:lnT w="6350">
+                      <a:solidFill>
+                        <a:srgbClr val="CBD5E1"/>
+                      </a:solidFill>
+                    </a:lnT>
+                    <a:lnB w="6350">
+                      <a:solidFill>
+                        <a:srgbClr val="CBD5E1"/>
+                      </a:solidFill>
+                    </a:lnB>
+                    <a:solidFill>
+                      <a:srgbClr val="FFFFFF"/>
+                    </a:solidFill>
+                  </a:tcPr>
+                </a:tc>
+                <a:tc>
+                  <a:txBody>
+                    <a:bodyPr/>
+                    <a:lstStyle/>
+                    <a:p>
+                      <a:pPr algn="l"/>
+                      <a:r>
+                        <a:rPr lang="ja-JP" sz="950" b="0" i="0">
+                          <a:solidFill>
+                            <a:srgbClr val="2D3748"/>
+                          </a:solidFill>
+                        </a:rPr>
+                        <a:t>docx / pptx</a:t>
+                      </a:r>
+                    </a:p>
+                  </a:txBody>
+                  <a:tcPr marL="73152" marR="73152" marT="13000" marB="13000" anchor="ctr">
+                    <a:lnL w="6350">
+                      <a:solidFill>
+                        <a:srgbClr val="CBD5E1"/>
+                      </a:solidFill>
+                    </a:lnL>
+                    <a:lnR w="6350">
+                      <a:solidFill>
+                        <a:srgbClr val="CBD5E1"/>
+                      </a:solidFill>
+                    </a:lnR>
+                    <a:lnT w="6350">
+                      <a:solidFill>
+                        <a:srgbClr val="CBD5E1"/>
+                      </a:solidFill>
+                    </a:lnT>
+                    <a:lnB w="6350">
+                      <a:solidFill>
+                        <a:srgbClr val="CBD5E1"/>
+                      </a:solidFill>
+                    </a:lnB>
+                    <a:solidFill>
+                      <a:srgbClr val="FFFFFF"/>
+                    </a:solidFill>
+                  </a:tcPr>
+                </a:tc>
+              </a:tr>
+              <a:tr h="330000">
+                <a:tc>
+                  <a:txBody>
+                    <a:bodyPr/>
+                    <a:lstStyle/>
+                    <a:p>
+                      <a:pPr algn="l"/>
+                      <a:r>
+                        <a:rPr lang="ja-JP" sz="950" b="1" i="0">
+                          <a:solidFill>
+                            <a:srgbClr val="1E2761"/>
+                          </a:solidFill>
+                        </a:rPr>
+                        <a:t>Visual Output</a:t>
+                      </a:r>
+                    </a:p>
+                  </a:txBody>
+                  <a:tcPr marL="73152" marR="73152" marT="13000" marB="13000" anchor="ctr">
+                    <a:lnL w="6350">
+                      <a:solidFill>
+                        <a:srgbClr val="CBD5E1"/>
+                      </a:solidFill>
+                    </a:lnL>
+                    <a:lnR w="6350">
+                      <a:solidFill>
+                        <a:srgbClr val="CBD5E1"/>
+                      </a:solidFill>
+                    </a:lnR>
+                    <a:lnT w="6350">
+                      <a:solidFill>
+                        <a:srgbClr val="CBD5E1"/>
+                      </a:solidFill>
+                    </a:lnT>
+                    <a:lnB w="6350">
+                      <a:solidFill>
+                        <a:srgbClr val="CBD5E1"/>
+                      </a:solidFill>
+                    </a:lnB>
+                    <a:solidFill>
+                      <a:srgbClr val="F1F5F9"/>
+                    </a:solidFill>
+                  </a:tcPr>
+                </a:tc>
+                <a:tc>
+                  <a:txBody>
+                    <a:bodyPr/>
+                    <a:lstStyle/>
+                    <a:p>
+                      <a:pPr algn="l"/>
+                      <a:r>
+                        <a:rPr lang="ja-JP" sz="950" b="0" i="0">
+                          <a:solidFill>
+                            <a:srgbClr val="2D3748"/>
+                          </a:solidFill>
+                        </a:rPr>
+                        <a:t>触れるHTML成果物を生成</a:t>
+                      </a:r>
+                    </a:p>
+                  </a:txBody>
+                  <a:tcPr marL="73152" marR="73152" marT="13000" marB="13000" anchor="ctr">
+                    <a:lnL w="6350">
+                      <a:solidFill>
+                        <a:srgbClr val="CBD5E1"/>
+                      </a:solidFill>
+                    </a:lnL>
+                    <a:lnR w="6350">
+                      <a:solidFill>
+                        <a:srgbClr val="CBD5E1"/>
+                      </a:solidFill>
+                    </a:lnR>
+                    <a:lnT w="6350">
+                      <a:solidFill>
+                        <a:srgbClr val="CBD5E1"/>
+                      </a:solidFill>
+                    </a:lnT>
+                    <a:lnB w="6350">
+                      <a:solidFill>
+                        <a:srgbClr val="CBD5E1"/>
+                      </a:solidFill>
+                    </a:lnB>
+                    <a:solidFill>
+                      <a:srgbClr val="F1F5F9"/>
+                    </a:solidFill>
+                  </a:tcPr>
+                </a:tc>
+                <a:tc>
+                  <a:txBody>
+                    <a:bodyPr/>
+                    <a:lstStyle/>
+                    <a:p>
+                      <a:pPr algn="l"/>
+                      <a:r>
+                        <a:rPr lang="ja-JP" sz="950" b="0" i="0">
+                          <a:solidFill>
+                            <a:srgbClr val="2D3748"/>
+                          </a:solidFill>
+                        </a:rPr>
+                        <a:t>スクリプト実行</a:t>
+                      </a:r>
+                    </a:p>
+                  </a:txBody>
+                  <a:tcPr marL="73152" marR="73152" marT="13000" marB="13000" anchor="ctr">
+                    <a:lnL w="6350">
+                      <a:solidFill>
+                        <a:srgbClr val="CBD5E1"/>
+                      </a:solidFill>
+                    </a:lnL>
+                    <a:lnR w="6350">
+                      <a:solidFill>
+                        <a:srgbClr val="CBD5E1"/>
+                      </a:solidFill>
+                    </a:lnR>
+                    <a:lnT w="6350">
+                      <a:solidFill>
+                        <a:srgbClr val="CBD5E1"/>
+                      </a:solidFill>
+                    </a:lnT>
+                    <a:lnB w="6350">
+                      <a:solidFill>
+                        <a:srgbClr val="CBD5E1"/>
+                      </a:solidFill>
+                    </a:lnB>
+                    <a:solidFill>
+                      <a:srgbClr val="F1F5F9"/>
+                    </a:solidFill>
+                  </a:tcPr>
+                </a:tc>
+                <a:tc>
+                  <a:txBody>
+                    <a:bodyPr/>
+                    <a:lstStyle/>
+                    <a:p>
+                      <a:pPr algn="l"/>
+                      <a:r>
+                        <a:rPr lang="ja-JP" sz="950" b="0" i="0">
+                          <a:solidFill>
+                            <a:srgbClr val="2D3748"/>
+                          </a:solidFill>
+                        </a:rPr>
+                        <a:t>codebase-visualizer</a:t>
+                      </a:r>
+                    </a:p>
+                  </a:txBody>
+                  <a:tcPr marL="73152" marR="73152" marT="13000" marB="13000" anchor="ctr">
+                    <a:lnL w="6350">
+                      <a:solidFill>
+                        <a:srgbClr val="CBD5E1"/>
+                      </a:solidFill>
+                    </a:lnL>
+                    <a:lnR w="6350">
+                      <a:solidFill>
+                        <a:srgbClr val="CBD5E1"/>
+                      </a:solidFill>
+                    </a:lnR>
+                    <a:lnT w="6350">
+                      <a:solidFill>
+                        <a:srgbClr val="CBD5E1"/>
+                      </a:solidFill>
+                    </a:lnT>
+                    <a:lnB w="6350">
+                      <a:solidFill>
+                        <a:srgbClr val="CBD5E1"/>
+                      </a:solidFill>
+                    </a:lnB>
+                    <a:solidFill>
+                      <a:srgbClr val="F1F5F9"/>
+                    </a:solidFill>
+                  </a:tcPr>
+                </a:tc>
+              </a:tr>
+              <a:tr h="330000">
+                <a:tc>
+                  <a:txBody>
+                    <a:bodyPr/>
+                    <a:lstStyle/>
+                    <a:p>
+                      <a:pPr algn="l"/>
+                      <a:r>
+                        <a:rPr lang="ja-JP" sz="950" b="1" i="0">
+                          <a:solidFill>
+                            <a:srgbClr val="1E2761"/>
+                          </a:solidFill>
+                        </a:rPr>
+                        <a:t>Dynamic Context</a:t>
+                      </a:r>
+                    </a:p>
+                  </a:txBody>
+                  <a:tcPr marL="73152" marR="73152" marT="13000" marB="13000" anchor="ctr">
+                    <a:lnL w="6350">
+                      <a:solidFill>
+                        <a:srgbClr val="CBD5E1"/>
+                      </a:solidFill>
+                    </a:lnL>
+                    <a:lnR w="6350">
+                      <a:solidFill>
+                        <a:srgbClr val="CBD5E1"/>
+                      </a:solidFill>
+                    </a:lnR>
+                    <a:lnT w="6350">
+                      <a:solidFill>
+                        <a:srgbClr val="CBD5E1"/>
+                      </a:solidFill>
+                    </a:lnT>
+                    <a:lnB w="6350">
+                      <a:solidFill>
+                        <a:srgbClr val="CBD5E1"/>
+                      </a:solidFill>
+                    </a:lnB>
+                    <a:solidFill>
+                      <a:srgbClr val="FFFFFF"/>
+                    </a:solidFill>
+                  </a:tcPr>
+                </a:tc>
+                <a:tc>
+                  <a:txBody>
+                    <a:bodyPr/>
+                    <a:lstStyle/>
+                    <a:p>
+                      <a:pPr algn="l"/>
+                      <a:r>
+                        <a:rPr lang="ja-JP" sz="950" b="0" i="0">
+                          <a:solidFill>
+                            <a:srgbClr val="2D3748"/>
+                          </a:solidFill>
+                        </a:rPr>
+                        <a:t>実行時に最新データを注入</a:t>
+                      </a:r>
+                    </a:p>
+                  </a:txBody>
+                  <a:tcPr marL="73152" marR="73152" marT="13000" marB="13000" anchor="ctr">
+                    <a:lnL w="6350">
+                      <a:solidFill>
+                        <a:srgbClr val="CBD5E1"/>
+                      </a:solidFill>
+                    </a:lnL>
+                    <a:lnR w="6350">
+                      <a:solidFill>
+                        <a:srgbClr val="CBD5E1"/>
+                      </a:solidFill>
+                    </a:lnR>
+                    <a:lnT w="6350">
+                      <a:solidFill>
+                        <a:srgbClr val="CBD5E1"/>
+                      </a:solidFill>
+                    </a:lnT>
+                    <a:lnB w="6350">
+                      <a:solidFill>
+                        <a:srgbClr val="CBD5E1"/>
+                      </a:solidFill>
+                    </a:lnB>
+                    <a:solidFill>
+                      <a:srgbClr val="FFFFFF"/>
+                    </a:solidFill>
+                  </a:tcPr>
+                </a:tc>
+                <a:tc>
+                  <a:txBody>
+                    <a:bodyPr/>
+                    <a:lstStyle/>
+                    <a:p>
+                      <a:pPr algn="l"/>
+                      <a:r>
+                        <a:rPr lang="ja-JP" sz="950" b="0" i="0">
+                          <a:solidFill>
+                            <a:srgbClr val="2D3748"/>
+                          </a:solidFill>
+                        </a:rPr>
+                        <a:t>!`command` 構文</a:t>
+                      </a:r>
+                    </a:p>
+                  </a:txBody>
+                  <a:tcPr marL="73152" marR="73152" marT="13000" marB="13000" anchor="ctr">
+                    <a:lnL w="6350">
+                      <a:solidFill>
+                        <a:srgbClr val="CBD5E1"/>
+                      </a:solidFill>
+                    </a:lnL>
+                    <a:lnR w="6350">
+                      <a:solidFill>
+                        <a:srgbClr val="CBD5E1"/>
+                      </a:solidFill>
+                    </a:lnR>
+                    <a:lnT w="6350">
+                      <a:solidFill>
+                        <a:srgbClr val="CBD5E1"/>
+                      </a:solidFill>
+                    </a:lnT>
+                    <a:lnB w="6350">
+                      <a:solidFill>
+                        <a:srgbClr val="CBD5E1"/>
+                      </a:solidFill>
+                    </a:lnB>
+                    <a:solidFill>
+                      <a:srgbClr val="FFFFFF"/>
+                    </a:solidFill>
+                  </a:tcPr>
+                </a:tc>
+                <a:tc>
+                  <a:txBody>
+                    <a:bodyPr/>
+                    <a:lstStyle/>
+                    <a:p>
+                      <a:pPr algn="l"/>
+                      <a:r>
+                        <a:rPr lang="ja-JP" sz="950" b="0" i="0">
+                          <a:solidFill>
+                            <a:srgbClr val="2D3748"/>
+                          </a:solidFill>
+                        </a:rPr>
+                        <a:t>!`git diff HEAD`</a:t>
+                      </a:r>
+                    </a:p>
+                  </a:txBody>
+                  <a:tcPr marL="73152" marR="73152" marT="13000" marB="13000" anchor="ctr">
+                    <a:lnL w="6350">
+                      <a:solidFill>
+                        <a:srgbClr val="CBD5E1"/>
+                      </a:solidFill>
+                    </a:lnL>
+                    <a:lnR w="6350">
+                      <a:solidFill>
+                        <a:srgbClr val="CBD5E1"/>
+                      </a:solidFill>
+                    </a:lnR>
+                    <a:lnT w="6350">
+                      <a:solidFill>
+                        <a:srgbClr val="CBD5E1"/>
+                      </a:solidFill>
+                    </a:lnT>
+                    <a:lnB w="6350">
+                      <a:solidFill>
+                        <a:srgbClr val="CBD5E1"/>
+                      </a:solidFill>
+                    </a:lnB>
+                    <a:solidFill>
+                      <a:srgbClr val="FFFFFF"/>
+                    </a:solidFill>
+                  </a:tcPr>
+                </a:tc>
+              </a:tr>
+              <a:tr h="330000">
+                <a:tc>
+                  <a:txBody>
+                    <a:bodyPr/>
+                    <a:lstStyle/>
+                    <a:p>
+                      <a:pPr algn="l"/>
+                      <a:r>
+                        <a:rPr lang="ja-JP" sz="950" b="1" i="0">
+                          <a:solidFill>
+                            <a:srgbClr val="1E2761"/>
+                          </a:solidFill>
+                        </a:rPr>
+                        <a:t>Forked Subagent</a:t>
+                      </a:r>
+                    </a:p>
+                  </a:txBody>
+                  <a:tcPr marL="73152" marR="73152" marT="13000" marB="13000" anchor="ctr">
+                    <a:lnL w="6350">
+                      <a:solidFill>
+                        <a:srgbClr val="CBD5E1"/>
+                      </a:solidFill>
+                    </a:lnL>
+                    <a:lnR w="6350">
+                      <a:solidFill>
+                        <a:srgbClr val="CBD5E1"/>
+                      </a:solidFill>
+                    </a:lnR>
+                    <a:lnT w="6350">
+                      <a:solidFill>
+                        <a:srgbClr val="CBD5E1"/>
+                      </a:solidFill>
+                    </a:lnT>
+                    <a:lnB w="6350">
+                      <a:solidFill>
+                        <a:srgbClr val="CBD5E1"/>
+                      </a:solidFill>
+                    </a:lnB>
+                    <a:solidFill>
+                      <a:srgbClr val="F1F5F9"/>
+                    </a:solidFill>
+                  </a:tcPr>
+                </a:tc>
+                <a:tc>
+                  <a:txBody>
+                    <a:bodyPr/>
+                    <a:lstStyle/>
+                    <a:p>
+                      <a:pPr algn="l"/>
+                      <a:r>
+                        <a:rPr lang="ja-JP" sz="950" b="0" i="0">
+                          <a:solidFill>
+                            <a:srgbClr val="2D3748"/>
+                          </a:solidFill>
+                        </a:rPr>
+                        <a:t>本体を汚さず隔離実行</a:t>
+                      </a:r>
+                    </a:p>
+                  </a:txBody>
+                  <a:tcPr marL="73152" marR="73152" marT="13000" marB="13000" anchor="ctr">
+                    <a:lnL w="6350">
+                      <a:solidFill>
+                        <a:srgbClr val="CBD5E1"/>
+                      </a:solidFill>
+                    </a:lnL>
+                    <a:lnR w="6350">
+                      <a:solidFill>
+                        <a:srgbClr val="CBD5E1"/>
+                      </a:solidFill>
+                    </a:lnR>
+                    <a:lnT w="6350">
+                      <a:solidFill>
+                        <a:srgbClr val="CBD5E1"/>
+                      </a:solidFill>
+                    </a:lnT>
+                    <a:lnB w="6350">
+                      <a:solidFill>
+                        <a:srgbClr val="CBD5E1"/>
+                      </a:solidFill>
+                    </a:lnB>
+                    <a:solidFill>
+                      <a:srgbClr val="F1F5F9"/>
+                    </a:solidFill>
+                  </a:tcPr>
+                </a:tc>
+                <a:tc>
+                  <a:txBody>
+                    <a:bodyPr/>
+                    <a:lstStyle/>
+                    <a:p>
+                      <a:pPr algn="l"/>
+                      <a:r>
+                        <a:rPr lang="ja-JP" sz="950" b="0" i="0">
+                          <a:solidFill>
+                            <a:srgbClr val="2D3748"/>
+                          </a:solidFill>
+                        </a:rPr>
+                        <a:t>context: fork</a:t>
+                      </a:r>
+                    </a:p>
+                  </a:txBody>
+                  <a:tcPr marL="73152" marR="73152" marT="13000" marB="13000" anchor="ctr">
+                    <a:lnL w="6350">
+                      <a:solidFill>
+                        <a:srgbClr val="CBD5E1"/>
+                      </a:solidFill>
+                    </a:lnL>
+                    <a:lnR w="6350">
+                      <a:solidFill>
+                        <a:srgbClr val="CBD5E1"/>
+                      </a:solidFill>
+                    </a:lnR>
+                    <a:lnT w="6350">
+                      <a:solidFill>
+                        <a:srgbClr val="CBD5E1"/>
+                      </a:solidFill>
+                    </a:lnT>
+                    <a:lnB w="6350">
+                      <a:solidFill>
+                        <a:srgbClr val="CBD5E1"/>
+                      </a:solidFill>
+                    </a:lnB>
+                    <a:solidFill>
+                      <a:srgbClr val="F1F5F9"/>
+                    </a:solidFill>
+                  </a:tcPr>
+                </a:tc>
+                <a:tc>
+                  <a:txBody>
+                    <a:bodyPr/>
+                    <a:lstStyle/>
+                    <a:p>
+                      <a:pPr algn="l"/>
+                      <a:r>
+                        <a:rPr lang="ja-JP" sz="950" b="0" i="0">
+                          <a:solidFill>
+                            <a:srgbClr val="2D3748"/>
+                          </a:solidFill>
+                        </a:rPr>
+                        <a:t>deep-research</a:t>
+                      </a:r>
+                    </a:p>
+                  </a:txBody>
+                  <a:tcPr marL="73152" marR="73152" marT="13000" marB="13000" anchor="ctr">
+                    <a:lnL w="6350">
+                      <a:solidFill>
+                        <a:srgbClr val="CBD5E1"/>
+                      </a:solidFill>
+                    </a:lnL>
+                    <a:lnR w="6350">
+                      <a:solidFill>
+                        <a:srgbClr val="CBD5E1"/>
+                      </a:solidFill>
+                    </a:lnR>
+                    <a:lnT w="6350">
+                      <a:solidFill>
+                        <a:srgbClr val="CBD5E1"/>
+                      </a:solidFill>
+                    </a:lnT>
+                    <a:lnB w="6350">
+                      <a:solidFill>
+                        <a:srgbClr val="CBD5E1"/>
+                      </a:solidFill>
+                    </a:lnB>
+                    <a:solidFill>
+                      <a:srgbClr val="F1F5F9"/>
+                    </a:solidFill>
+                  </a:tcPr>
+                </a:tc>
+              </a:tr>
+              <a:tr h="330000">
+                <a:tc>
+                  <a:txBody>
+                    <a:bodyPr/>
+                    <a:lstStyle/>
+                    <a:p>
+                      <a:pPr algn="l"/>
+                      <a:r>
+                        <a:rPr lang="ja-JP" sz="950" b="1" i="0">
+                          <a:solidFill>
+                            <a:srgbClr val="1E2761"/>
+                          </a:solidFill>
+                        </a:rPr>
+                        <a:t>Background Knowledge</a:t>
+                      </a:r>
+                    </a:p>
+                  </a:txBody>
+                  <a:tcPr marL="73152" marR="73152" marT="13000" marB="13000" anchor="ctr">
+                    <a:lnL w="6350">
+                      <a:solidFill>
+                        <a:srgbClr val="CBD5E1"/>
+                      </a:solidFill>
+                    </a:lnL>
+                    <a:lnR w="6350">
+                      <a:solidFill>
+                        <a:srgbClr val="CBD5E1"/>
+                      </a:solidFill>
+                    </a:lnR>
+                    <a:lnT w="6350">
+                      <a:solidFill>
+                        <a:srgbClr val="CBD5E1"/>
+                      </a:solidFill>
+                    </a:lnT>
+                    <a:lnB w="6350">
+                      <a:solidFill>
+                        <a:srgbClr val="CBD5E1"/>
+                      </a:solidFill>
+                    </a:lnB>
+                    <a:solidFill>
+                      <a:srgbClr val="FFFFFF"/>
+                    </a:solidFill>
+                  </a:tcPr>
+                </a:tc>
+                <a:tc>
+                  <a:txBody>
+                    <a:bodyPr/>
+                    <a:lstStyle/>
+                    <a:p>
+                      <a:pPr algn="l"/>
+                      <a:r>
+                        <a:rPr lang="ja-JP" sz="950" b="0" i="0">
+                          <a:solidFill>
+                            <a:srgbClr val="2D3748"/>
+                          </a:solidFill>
+                        </a:rPr>
+                        <a:t>背景知識を常時参照</a:t>
+                      </a:r>
+                    </a:p>
+                  </a:txBody>
+                  <a:tcPr marL="73152" marR="73152" marT="13000" marB="13000" anchor="ctr">
+                    <a:lnL w="6350">
+                      <a:solidFill>
+                        <a:srgbClr val="CBD5E1"/>
+                      </a:solidFill>
+                    </a:lnL>
+                    <a:lnR w="6350">
+                      <a:solidFill>
+                        <a:srgbClr val="CBD5E1"/>
+                      </a:solidFill>
+                    </a:lnR>
+                    <a:lnT w="6350">
+                      <a:solidFill>
+                        <a:srgbClr val="CBD5E1"/>
+                      </a:solidFill>
+                    </a:lnT>
+                    <a:lnB w="6350">
+                      <a:solidFill>
+                        <a:srgbClr val="CBD5E1"/>
+                      </a:solidFill>
+                    </a:lnB>
+                    <a:solidFill>
+                      <a:srgbClr val="FFFFFF"/>
+                    </a:solidFill>
+                  </a:tcPr>
+                </a:tc>
+                <a:tc>
+                  <a:txBody>
+                    <a:bodyPr/>
+                    <a:lstStyle/>
+                    <a:p>
+                      <a:pPr algn="l"/>
+                      <a:r>
+                        <a:rPr lang="ja-JP" sz="950" b="0" i="0">
+                          <a:solidFill>
+                            <a:srgbClr val="2D3748"/>
+                          </a:solidFill>
+                        </a:rPr>
+                        <a:t>user-invocable: false</a:t>
+                      </a:r>
+                    </a:p>
+                  </a:txBody>
+                  <a:tcPr marL="73152" marR="73152" marT="13000" marB="13000" anchor="ctr">
+                    <a:lnL w="6350">
+                      <a:solidFill>
+                        <a:srgbClr val="CBD5E1"/>
+                      </a:solidFill>
+                    </a:lnL>
+                    <a:lnR w="6350">
+                      <a:solidFill>
+                        <a:srgbClr val="CBD5E1"/>
+                      </a:solidFill>
+                    </a:lnR>
+                    <a:lnT w="6350">
+                      <a:solidFill>
+                        <a:srgbClr val="CBD5E1"/>
+                      </a:solidFill>
+                    </a:lnT>
+                    <a:lnB w="6350">
+                      <a:solidFill>
+                        <a:srgbClr val="CBD5E1"/>
+                      </a:solidFill>
+                    </a:lnB>
+                    <a:solidFill>
+                      <a:srgbClr val="FFFFFF"/>
+                    </a:solidFill>
+                  </a:tcPr>
+                </a:tc>
+                <a:tc>
+                  <a:txBody>
+                    <a:bodyPr/>
+                    <a:lstStyle/>
+                    <a:p>
+                      <a:pPr algn="l"/>
+                      <a:r>
+                        <a:rPr lang="ja-JP" sz="950" b="0" i="0">
+                          <a:solidFill>
+                            <a:srgbClr val="2D3748"/>
+                          </a:solidFill>
+                        </a:rPr>
+                        <a:t>legacy-context</a:t>
+                      </a:r>
+                    </a:p>
+                  </a:txBody>
+                  <a:tcPr marL="73152" marR="73152" marT="13000" marB="13000" anchor="ctr">
+                    <a:lnL w="6350">
+                      <a:solidFill>
+                        <a:srgbClr val="CBD5E1"/>
+                      </a:solidFill>
+                    </a:lnL>
+                    <a:lnR w="6350">
+                      <a:solidFill>
+                        <a:srgbClr val="CBD5E1"/>
+                      </a:solidFill>
+                    </a:lnR>
+                    <a:lnT w="6350">
+                      <a:solidFill>
+                        <a:srgbClr val="CBD5E1"/>
+                      </a:solidFill>
+                    </a:lnT>
+                    <a:lnB w="6350">
+                      <a:solidFill>
+                        <a:srgbClr val="CBD5E1"/>
+                      </a:solidFill>
+                    </a:lnB>
+                    <a:solidFill>
+                      <a:srgbClr val="FFFFFF"/>
+                    </a:solidFill>
+                  </a:tcPr>
+                </a:tc>
+              </a:tr>
+              <a:tr h="330000">
+                <a:tc>
+                  <a:txBody>
+                    <a:bodyPr/>
+                    <a:lstStyle/>
+                    <a:p>
+                      <a:pPr algn="l"/>
+                      <a:r>
+                        <a:rPr lang="ja-JP" sz="950" b="1" i="0">
+                          <a:solidFill>
+                            <a:srgbClr val="1E2761"/>
+                          </a:solidFill>
+                        </a:rPr>
+                        <a:t>Meta Skill</a:t>
+                      </a:r>
+                    </a:p>
+                  </a:txBody>
+                  <a:tcPr marL="73152" marR="73152" marT="13000" marB="13000" anchor="ctr">
+                    <a:lnL w="6350">
+                      <a:solidFill>
+                        <a:srgbClr val="CBD5E1"/>
+                      </a:solidFill>
+                    </a:lnL>
+                    <a:lnR w="6350">
+                      <a:solidFill>
+                        <a:srgbClr val="CBD5E1"/>
+                      </a:solidFill>
+                    </a:lnR>
+                    <a:lnT w="6350">
+                      <a:solidFill>
+                        <a:srgbClr val="CBD5E1"/>
+                      </a:solidFill>
+                    </a:lnT>
+                    <a:lnB w="6350">
+                      <a:solidFill>
+                        <a:srgbClr val="CBD5E1"/>
+                      </a:solidFill>
+                    </a:lnB>
+                    <a:solidFill>
+                      <a:srgbClr val="F1F5F9"/>
+                    </a:solidFill>
+                  </a:tcPr>
+                </a:tc>
+                <a:tc>
+                  <a:txBody>
+                    <a:bodyPr/>
+                    <a:lstStyle/>
+                    <a:p>
+                      <a:pPr algn="l"/>
+                      <a:r>
+                        <a:rPr lang="ja-JP" sz="950" b="0" i="0">
+                          <a:solidFill>
+                            <a:srgbClr val="2D3748"/>
+                          </a:solidFill>
+                        </a:rPr>
+                        <a:t>Skill を評価・改善</a:t>
+                      </a:r>
+                    </a:p>
+                  </a:txBody>
+                  <a:tcPr marL="73152" marR="73152" marT="13000" marB="13000" anchor="ctr">
+                    <a:lnL w="6350">
+                      <a:solidFill>
+                        <a:srgbClr val="CBD5E1"/>
+                      </a:solidFill>
+                    </a:lnL>
+                    <a:lnR w="6350">
+                      <a:solidFill>
+                        <a:srgbClr val="CBD5E1"/>
+                      </a:solidFill>
+                    </a:lnR>
+                    <a:lnT w="6350">
+                      <a:solidFill>
+                        <a:srgbClr val="CBD5E1"/>
+                      </a:solidFill>
+                    </a:lnT>
+                    <a:lnB w="6350">
+                      <a:solidFill>
+                        <a:srgbClr val="CBD5E1"/>
+                      </a:solidFill>
+                    </a:lnB>
+                    <a:solidFill>
+                      <a:srgbClr val="F1F5F9"/>
+                    </a:solidFill>
+                  </a:tcPr>
+                </a:tc>
+                <a:tc>
+                  <a:txBody>
+                    <a:bodyPr/>
+                    <a:lstStyle/>
+                    <a:p>
+                      <a:pPr algn="l"/>
+                      <a:r>
+                        <a:rPr lang="ja-JP" sz="950" b="0" i="0">
+                          <a:solidFill>
+                            <a:srgbClr val="2D3748"/>
+                          </a:solidFill>
+                        </a:rPr>
+                        <a:t>skill-creator</a:t>
+                      </a:r>
+                    </a:p>
+                  </a:txBody>
+                  <a:tcPr marL="73152" marR="73152" marT="13000" marB="13000" anchor="ctr">
+                    <a:lnL w="6350">
+                      <a:solidFill>
+                        <a:srgbClr val="CBD5E1"/>
+                      </a:solidFill>
+                    </a:lnL>
+                    <a:lnR w="6350">
+                      <a:solidFill>
+                        <a:srgbClr val="CBD5E1"/>
+                      </a:solidFill>
+                    </a:lnR>
+                    <a:lnT w="6350">
+                      <a:solidFill>
+                        <a:srgbClr val="CBD5E1"/>
+                      </a:solidFill>
+                    </a:lnT>
+                    <a:lnB w="6350">
+                      <a:solidFill>
+                        <a:srgbClr val="CBD5E1"/>
+                      </a:solidFill>
+                    </a:lnB>
+                    <a:solidFill>
+                      <a:srgbClr val="F1F5F9"/>
+                    </a:solidFill>
+                  </a:tcPr>
+                </a:tc>
+                <a:tc>
+                  <a:txBody>
+                    <a:bodyPr/>
+                    <a:lstStyle/>
+                    <a:p>
+                      <a:pPr algn="l"/>
+                      <a:r>
+                        <a:rPr lang="ja-JP" sz="950" b="0" i="0">
+                          <a:solidFill>
+                            <a:srgbClr val="2D3748"/>
+                          </a:solidFill>
+                        </a:rPr>
+                        <a:t>skill-creator</a:t>
+                      </a:r>
+                    </a:p>
+                  </a:txBody>
+                  <a:tcPr marL="73152" marR="73152" marT="13000" marB="13000" anchor="ctr">
+                    <a:lnL w="6350">
+                      <a:solidFill>
+                        <a:srgbClr val="CBD5E1"/>
+                      </a:solidFill>
+                    </a:lnL>
+                    <a:lnR w="6350">
+                      <a:solidFill>
+                        <a:srgbClr val="CBD5E1"/>
+                      </a:solidFill>
+                    </a:lnR>
+                    <a:lnT w="6350">
+                      <a:solidFill>
+                        <a:srgbClr val="CBD5E1"/>
+                      </a:solidFill>
+                    </a:lnT>
+                    <a:lnB w="6350">
+                      <a:solidFill>
+                        <a:srgbClr val="CBD5E1"/>
+                      </a:solidFill>
+                    </a:lnB>
+                    <a:solidFill>
+                      <a:srgbClr val="F1F5F9"/>
+                    </a:solidFill>
+                  </a:tcPr>
+                </a:tc>
+              </a:tr>
+            </a:tbl>
+          </a:graphicData>
+        </a:graphic>
+      </p:graphicFrame>
+      <p:sp>
+        <p:nvSpPr>
+          <p:cNvPr id="31" name="doclink"/>
+          <p:cNvSpPr txBox="1"/>
+          <p:nvPr/>
+        </p:nvSpPr>
+        <p:spPr>
+          <a:xfrm>
+            <a:off x="457200" y="4420000"/>
+            <a:ext cx="4600000" cy="280000"/>
+          </a:xfrm>
+          <a:prstGeom prst="rect">
+            <a:avLst/>
+          </a:prstGeom>
+          <a:noFill/>
+        </p:spPr>
+        <p:txBody>
+          <a:bodyPr wrap="square" lIns="0" rIns="0" tIns="0" bIns="0">
+            <a:spAutoFit/>
+          </a:bodyPr>
+          <a:lstStyle/>
+          <a:p>
+            <a:r>
+              <a:rPr lang="ja-JP" sz="1050" b="1" i="0">
+                <a:solidFill>
+                  <a:srgbClr val="1E2761"/>
+                </a:solidFill>
+              </a:rPr>
+              <a:t xml:space="preserve">公式ドキュメント ▸ </a:t>
+            </a:r>
+            <a:r>
+              <a:rPr lang="en-US" sz="1050" b="0" i="0" u="sng">
+                <a:solidFill>
+                  <a:srgbClr val="1C7293"/>
+                </a:solidFill>
+                <a:hlinkClick r:id="rId2"/>
+              </a:rPr>
+              <a:t>code.claude.com/docs/en/skills</a:t>
+            </a:r>
+          </a:p>
+        </p:txBody>
+      </p:sp>
+      <p:sp>
+        <p:nvSpPr>
+          <p:cNvPr id="30" name="dots"/>
+          <p:cNvSpPr txBox="1"/>
+          <p:nvPr/>
+        </p:nvSpPr>
+        <p:spPr>
+          <a:xfrm>
+            <a:off x="5486400" y="4828032"/>
+            <a:ext cx="3474720" cy="228600"/>
+          </a:xfrm>
+          <a:prstGeom prst="rect">
+            <a:avLst/>
+          </a:prstGeom>
+          <a:noFill/>
+        </p:spPr>
+        <p:txBody>
+          <a:bodyPr wrap="square" lIns="0" rIns="0" tIns="0" bIns="0">
+            <a:spAutoFit/>
+          </a:bodyPr>
+          <a:lstStyle/>
+          <a:p>
+            <a:r>
+              <a:rPr lang="ja-JP" sz="1000" b="0" i="0">
+                <a:solidFill>
+                  <a:srgbClr val="64748B"/>
+                </a:solidFill>
+              </a:rPr>
+              <a:t>● ● ● ● ● ● ● ○ ○ ○ ○</a:t>
+            </a:r>
+          </a:p>
+        </p:txBody>
+      </p:sp>
+    </p:spTree>
+  </p:cSld>
+  <p:clrMapOvr>
+    <a:masterClrMapping/>
+  </p:clrMapOvr>
+</p:sld>
+</file>
+
+<file path=ppt/slides/slide16.xml><?xml version="1.0" encoding="utf-8"?>
+<p:sld xmlns:a="http://schemas.openxmlformats.org/drawingml/2006/main" xmlns:p="http://schemas.openxmlformats.org/presentationml/2006/main" xmlns:r="http://schemas.openxmlformats.org/officeDocument/2006/relationships">
+  <p:cSld>
+    <p:bg>
+      <p:bgPr>
+        <a:solidFill>
+          <a:srgbClr val="FFFFFF"/>
+        </a:solidFill>
+        <a:effectLst/>
+      </p:bgPr>
+    </p:bg>
+    <p:spTree>
+      <p:nvGrpSpPr>
+        <p:cNvPr id="1" name=""/>
+        <p:cNvGrpSpPr/>
+        <p:nvPr/>
+      </p:nvGrpSpPr>
+      <p:grpSpPr/>
+      <p:sp>
+        <p:nvSpPr>
+          <p:cNvPr id="2" name="title"/>
+          <p:cNvSpPr txBox="1"/>
+          <p:nvPr/>
+        </p:nvSpPr>
+        <p:spPr>
+          <a:xfrm>
+            <a:off x="457200" y="320040"/>
+            <a:ext cx="8229600" cy="548640"/>
+          </a:xfrm>
+          <a:prstGeom prst="rect">
+            <a:avLst/>
+          </a:prstGeom>
+          <a:noFill/>
+        </p:spPr>
+        <p:txBody>
+          <a:bodyPr wrap="square" lIns="0" rIns="0" tIns="0" bIns="0">
+            <a:spAutoFit/>
+          </a:bodyPr>
+          <a:lstStyle/>
+          <a:p>
+            <a:r>
+              <a:rPr lang="ja-JP" sz="2400" b="1" i="0">
+                <a:solidFill>
+                  <a:srgbClr val="1E2761"/>
+                </a:solidFill>
+              </a:rPr>
+              <a:t>金融ドメインでのユースケース ― 8型 × 実務</a:t>
+            </a:r>
+          </a:p>
+        </p:txBody>
+      </p:sp>
+      <p:sp>
+        <p:nvSpPr>
+          <p:cNvPr id="3" name="sub"/>
+          <p:cNvSpPr txBox="1"/>
+          <p:nvPr/>
+        </p:nvSpPr>
+        <p:spPr>
+          <a:xfrm>
+            <a:off x="457200" y="960000"/>
+            <a:ext cx="8229600" cy="330000"/>
+          </a:xfrm>
+          <a:prstGeom prst="rect">
+            <a:avLst/>
+          </a:prstGeom>
+          <a:noFill/>
+        </p:spPr>
+        <p:txBody>
+          <a:bodyPr wrap="square" lIns="0" rIns="0" tIns="0" bIns="0">
+            <a:spAutoFit/>
+          </a:bodyPr>
+          <a:lstStyle/>
+          <a:p>
+            <a:r>
+              <a:rPr lang="ja-JP" sz="1300" b="0" i="1">
+                <a:solidFill>
+                  <a:srgbClr val="64748B"/>
+                </a:solidFill>
+              </a:rPr>
+              <a:t>前半6回の「守り」を踏まえ、各型を金融×エンタープライズ開発の実務に落とす</a:t>
+            </a:r>
+          </a:p>
+        </p:txBody>
+      </p:sp>
+      <p:graphicFrame>
+        <p:nvGraphicFramePr>
+          <p:cNvPr id="20" name="Table"/>
+          <p:cNvGraphicFramePr/>
+          <p:nvPr/>
+        </p:nvGraphicFramePr>
+        <p:xfrm>
+          <a:off x="457200" y="1350000"/>
+          <a:ext cx="8229600" cy="100000"/>
+        </p:xfrm>
+        <a:graphic>
+          <a:graphicData uri="http://schemas.openxmlformats.org/drawingml/2006/table">
+            <a:tbl>
+              <a:tblPr firstRow="1" bandRow="0"/>
+              <a:tblGrid>
+                <a:gridCol w="1900000"/>
+                <a:gridCol w="6329600"/>
+              </a:tblGrid>
+              <a:tr h="330000">
+                <a:tc>
+                  <a:txBody>
+                    <a:bodyPr/>
+                    <a:lstStyle/>
+                    <a:p>
+                      <a:pPr algn="l"/>
+                      <a:r>
+                        <a:rPr lang="ja-JP" sz="1000" b="1" i="0">
+                          <a:solidFill>
+                            <a:srgbClr val="FFFFFF"/>
+                          </a:solidFill>
+                        </a:rPr>
+                        <a:t>型</a:t>
+                      </a:r>
+                    </a:p>
+                  </a:txBody>
+                  <a:tcPr marL="73152" marR="73152" marT="16000" marB="16000" anchor="ctr">
+                    <a:lnL w="6350">
+                      <a:solidFill>
+                        <a:srgbClr val="CBD5E1"/>
+                      </a:solidFill>
+                    </a:lnL>
+                    <a:lnR w="6350">
+                      <a:solidFill>
+                        <a:srgbClr val="CBD5E1"/>
+                      </a:solidFill>
+                    </a:lnR>
+                    <a:lnT w="6350">
+                      <a:solidFill>
+                        <a:srgbClr val="CBD5E1"/>
+                      </a:solidFill>
+                    </a:lnT>
+                    <a:lnB w="6350">
+                      <a:solidFill>
+                        <a:srgbClr val="CBD5E1"/>
+                      </a:solidFill>
+                    </a:lnB>
+                    <a:solidFill>
+                      <a:srgbClr val="1E2761"/>
+                    </a:solidFill>
+                  </a:tcPr>
+                </a:tc>
+                <a:tc>
+                  <a:txBody>
+                    <a:bodyPr/>
+                    <a:lstStyle/>
+                    <a:p>
+                      <a:pPr algn="l"/>
+                      <a:r>
+                        <a:rPr lang="ja-JP" sz="1000" b="1" i="0">
+                          <a:solidFill>
+                            <a:srgbClr val="FFFFFF"/>
+                          </a:solidFill>
+                        </a:rPr>
+                        <a:t>ユースケース（金融ドメイン / エンタープライズ開発）</a:t>
+                      </a:r>
+                    </a:p>
+                  </a:txBody>
+                  <a:tcPr marL="73152" marR="73152" marT="16000" marB="16000" anchor="ctr">
+                    <a:lnL w="6350">
+                      <a:solidFill>
+                        <a:srgbClr val="CBD5E1"/>
+                      </a:solidFill>
+                    </a:lnL>
+                    <a:lnR w="6350">
+                      <a:solidFill>
+                        <a:srgbClr val="CBD5E1"/>
+                      </a:solidFill>
+                    </a:lnR>
+                    <a:lnT w="6350">
+                      <a:solidFill>
+                        <a:srgbClr val="CBD5E1"/>
+                      </a:solidFill>
+                    </a:lnT>
+                    <a:lnB w="6350">
+                      <a:solidFill>
+                        <a:srgbClr val="CBD5E1"/>
+                      </a:solidFill>
+                    </a:lnB>
+                    <a:solidFill>
+                      <a:srgbClr val="1E2761"/>
+                    </a:solidFill>
+                  </a:tcPr>
+                </a:tc>
+              </a:tr>
+              <a:tr h="355000">
+                <a:tc>
+                  <a:txBody>
+                    <a:bodyPr/>
+                    <a:lstStyle/>
+                    <a:p>
+                      <a:pPr algn="l"/>
+                      <a:r>
+                        <a:rPr lang="ja-JP" sz="950" b="1" i="0">
+                          <a:solidFill>
+                            <a:srgbClr val="1E2761"/>
+                          </a:solidFill>
+                        </a:rPr>
+                        <a:t>Reference</a:t>
+                      </a:r>
+                    </a:p>
+                  </a:txBody>
+                  <a:tcPr marL="73152" marR="73152" marT="16000" marB="16000" anchor="ctr">
+                    <a:lnL w="6350">
+                      <a:solidFill>
+                        <a:srgbClr val="CBD5E1"/>
+                      </a:solidFill>
+                    </a:lnL>
+                    <a:lnR w="6350">
+                      <a:solidFill>
+                        <a:srgbClr val="CBD5E1"/>
+                      </a:solidFill>
+                    </a:lnR>
+                    <a:lnT w="6350">
+                      <a:solidFill>
+                        <a:srgbClr val="CBD5E1"/>
+                      </a:solidFill>
+                    </a:lnT>
+                    <a:lnB w="6350">
+                      <a:solidFill>
+                        <a:srgbClr val="CBD5E1"/>
+                      </a:solidFill>
+                    </a:lnB>
+                    <a:solidFill>
+                      <a:srgbClr val="FFFFFF"/>
+                    </a:solidFill>
+                  </a:tcPr>
+                </a:tc>
+                <a:tc>
+                  <a:txBody>
+                    <a:bodyPr/>
+                    <a:lstStyle/>
+                    <a:p>
+                      <a:pPr algn="l"/>
+                      <a:r>
+                        <a:rPr lang="ja-JP" sz="950" b="0" i="0">
+                          <a:solidFill>
+                            <a:srgbClr val="2D3748"/>
+                          </a:solidFill>
+                        </a:rPr>
+                        <a:t>リスク指標の定義集（VaR・ES・デュレーション）を注入し定義のブレを防ぐ</a:t>
+                      </a:r>
+                    </a:p>
+                  </a:txBody>
+                  <a:tcPr marL="73152" marR="73152" marT="16000" marB="16000" anchor="ctr">
+                    <a:lnL w="6350">
+                      <a:solidFill>
+                        <a:srgbClr val="CBD5E1"/>
+                      </a:solidFill>
+                    </a:lnL>
+                    <a:lnR w="6350">
+                      <a:solidFill>
+                        <a:srgbClr val="CBD5E1"/>
+                      </a:solidFill>
+                    </a:lnR>
+                    <a:lnT w="6350">
+                      <a:solidFill>
+                        <a:srgbClr val="CBD5E1"/>
+                      </a:solidFill>
+                    </a:lnT>
+                    <a:lnB w="6350">
+                      <a:solidFill>
+                        <a:srgbClr val="CBD5E1"/>
+                      </a:solidFill>
+                    </a:lnB>
+                    <a:solidFill>
+                      <a:srgbClr val="FFFFFF"/>
+                    </a:solidFill>
+                  </a:tcPr>
+                </a:tc>
+              </a:tr>
+              <a:tr h="355000">
+                <a:tc>
+                  <a:txBody>
+                    <a:bodyPr/>
+                    <a:lstStyle/>
+                    <a:p>
+                      <a:pPr algn="l"/>
+                      <a:r>
+                        <a:rPr lang="ja-JP" sz="950" b="1" i="0">
+                          <a:solidFill>
+                            <a:srgbClr val="1E2761"/>
+                          </a:solidFill>
+                        </a:rPr>
+                        <a:t>Task</a:t>
+                      </a:r>
+                    </a:p>
+                  </a:txBody>
+                  <a:tcPr marL="73152" marR="73152" marT="16000" marB="16000" anchor="ctr">
+                    <a:lnL w="6350">
+                      <a:solidFill>
+                        <a:srgbClr val="CBD5E1"/>
+                      </a:solidFill>
+                    </a:lnL>
+                    <a:lnR w="6350">
+                      <a:solidFill>
+                        <a:srgbClr val="CBD5E1"/>
+                      </a:solidFill>
+                    </a:lnR>
+                    <a:lnT w="6350">
+                      <a:solidFill>
+                        <a:srgbClr val="CBD5E1"/>
+                      </a:solidFill>
+                    </a:lnT>
+                    <a:lnB w="6350">
+                      <a:solidFill>
+                        <a:srgbClr val="CBD5E1"/>
+                      </a:solidFill>
+                    </a:lnB>
+                    <a:solidFill>
+                      <a:srgbClr val="F1F5F9"/>
+                    </a:solidFill>
+                  </a:tcPr>
+                </a:tc>
+                <a:tc>
+                  <a:txBody>
+                    <a:bodyPr/>
+                    <a:lstStyle/>
+                    <a:p>
+                      <a:pPr algn="l"/>
+                      <a:r>
+                        <a:rPr lang="ja-JP" sz="950" b="0" i="0">
+                          <a:solidFill>
+                            <a:srgbClr val="2D3748"/>
+                          </a:solidFill>
+                        </a:rPr>
+                        <a:t>/fix-issue で issue→修正→テスト→コミット、/release-notes で MR から生成</a:t>
+                      </a:r>
+                    </a:p>
+                  </a:txBody>
+                  <a:tcPr marL="73152" marR="73152" marT="16000" marB="16000" anchor="ctr">
+                    <a:lnL w="6350">
+                      <a:solidFill>
+                        <a:srgbClr val="CBD5E1"/>
+                      </a:solidFill>
+                    </a:lnL>
+                    <a:lnR w="6350">
+                      <a:solidFill>
+                        <a:srgbClr val="CBD5E1"/>
+                      </a:solidFill>
+                    </a:lnR>
+                    <a:lnT w="6350">
+                      <a:solidFill>
+                        <a:srgbClr val="CBD5E1"/>
+                      </a:solidFill>
+                    </a:lnT>
+                    <a:lnB w="6350">
+                      <a:solidFill>
+                        <a:srgbClr val="CBD5E1"/>
+                      </a:solidFill>
+                    </a:lnB>
+                    <a:solidFill>
+                      <a:srgbClr val="F1F5F9"/>
+                    </a:solidFill>
+                  </a:tcPr>
+                </a:tc>
+              </a:tr>
+              <a:tr h="355000">
+                <a:tc>
+                  <a:txBody>
+                    <a:bodyPr/>
+                    <a:lstStyle/>
+                    <a:p>
+                      <a:pPr algn="l"/>
+                      <a:r>
+                        <a:rPr lang="ja-JP" sz="950" b="1" i="0">
+                          <a:solidFill>
+                            <a:srgbClr val="1E2761"/>
+                          </a:solidFill>
+                        </a:rPr>
+                        <a:t>Document</a:t>
+                      </a:r>
+                    </a:p>
+                  </a:txBody>
+                  <a:tcPr marL="73152" marR="73152" marT="16000" marB="16000" anchor="ctr">
+                    <a:lnL w="6350">
+                      <a:solidFill>
+                        <a:srgbClr val="CBD5E1"/>
+                      </a:solidFill>
+                    </a:lnL>
+                    <a:lnR w="6350">
+                      <a:solidFill>
+                        <a:srgbClr val="CBD5E1"/>
+                      </a:solidFill>
+                    </a:lnR>
+                    <a:lnT w="6350">
+                      <a:solidFill>
+                        <a:srgbClr val="CBD5E1"/>
+                      </a:solidFill>
+                    </a:lnT>
+                    <a:lnB w="6350">
+                      <a:solidFill>
+                        <a:srgbClr val="CBD5E1"/>
+                      </a:solidFill>
+                    </a:lnB>
+                    <a:solidFill>
+                      <a:srgbClr val="FFFFFF"/>
+                    </a:solidFill>
+                  </a:tcPr>
+                </a:tc>
+                <a:tc>
+                  <a:txBody>
+                    <a:bodyPr/>
+                    <a:lstStyle/>
+                    <a:p>
+                      <a:pPr algn="l"/>
+                      <a:r>
+                        <a:rPr lang="ja-JP" sz="950" b="0" i="0">
+                          <a:solidFill>
+                            <a:srgbClr val="2D3748"/>
+                          </a:solidFill>
+                        </a:rPr>
+                        <a:t>分析結果→IRレポート(docx)・報告資料(pptx)・監査エビデンス(pdf)を自動生成</a:t>
+                      </a:r>
+                    </a:p>
+                  </a:txBody>
+                  <a:tcPr marL="73152" marR="73152" marT="16000" marB="16000" anchor="ctr">
+                    <a:lnL w="6350">
+                      <a:solidFill>
+                        <a:srgbClr val="CBD5E1"/>
+                      </a:solidFill>
+                    </a:lnL>
+                    <a:lnR w="6350">
+                      <a:solidFill>
+                        <a:srgbClr val="CBD5E1"/>
+                      </a:solidFill>
+                    </a:lnR>
+                    <a:lnT w="6350">
+                      <a:solidFill>
+                        <a:srgbClr val="CBD5E1"/>
+                      </a:solidFill>
+                    </a:lnT>
+                    <a:lnB w="6350">
+                      <a:solidFill>
+                        <a:srgbClr val="CBD5E1"/>
+                      </a:solidFill>
+                    </a:lnB>
+                    <a:solidFill>
+                      <a:srgbClr val="FFFFFF"/>
+                    </a:solidFill>
+                  </a:tcPr>
+                </a:tc>
+              </a:tr>
+              <a:tr h="355000">
+                <a:tc>
+                  <a:txBody>
+                    <a:bodyPr/>
+                    <a:lstStyle/>
+                    <a:p>
+                      <a:pPr algn="l"/>
+                      <a:r>
+                        <a:rPr lang="ja-JP" sz="950" b="1" i="0">
+                          <a:solidFill>
+                            <a:srgbClr val="1E2761"/>
+                          </a:solidFill>
+                        </a:rPr>
+                        <a:t>Visual Output</a:t>
+                      </a:r>
+                    </a:p>
+                  </a:txBody>
+                  <a:tcPr marL="73152" marR="73152" marT="16000" marB="16000" anchor="ctr">
+                    <a:lnL w="6350">
+                      <a:solidFill>
+                        <a:srgbClr val="CBD5E1"/>
+                      </a:solidFill>
+                    </a:lnL>
+                    <a:lnR w="6350">
+                      <a:solidFill>
+                        <a:srgbClr val="CBD5E1"/>
+                      </a:solidFill>
+                    </a:lnR>
+                    <a:lnT w="6350">
+                      <a:solidFill>
+                        <a:srgbClr val="CBD5E1"/>
+                      </a:solidFill>
+                    </a:lnT>
+                    <a:lnB w="6350">
+                      <a:solidFill>
+                        <a:srgbClr val="CBD5E1"/>
+                      </a:solidFill>
+                    </a:lnB>
+                    <a:solidFill>
+                      <a:srgbClr val="F1F5F9"/>
+                    </a:solidFill>
+                  </a:tcPr>
+                </a:tc>
+                <a:tc>
+                  <a:txBody>
+                    <a:bodyPr/>
+                    <a:lstStyle/>
+                    <a:p>
+                      <a:pPr algn="l"/>
+                      <a:r>
+                        <a:rPr lang="ja-JP" sz="950" b="0" i="0">
+                          <a:solidFill>
+                            <a:srgbClr val="2D3748"/>
+                          </a:solidFill>
+                        </a:rPr>
+                        <a:t>ポートフォリオのリスク内訳・依存グラフをインタラクティブHTMLで可視化</a:t>
+                      </a:r>
+                    </a:p>
+                  </a:txBody>
+                  <a:tcPr marL="73152" marR="73152" marT="16000" marB="16000" anchor="ctr">
+                    <a:lnL w="6350">
+                      <a:solidFill>
+                        <a:srgbClr val="CBD5E1"/>
+                      </a:solidFill>
+                    </a:lnL>
+                    <a:lnR w="6350">
+                      <a:solidFill>
+                        <a:srgbClr val="CBD5E1"/>
+                      </a:solidFill>
+                    </a:lnR>
+                    <a:lnT w="6350">
+                      <a:solidFill>
+                        <a:srgbClr val="CBD5E1"/>
+                      </a:solidFill>
+                    </a:lnT>
+                    <a:lnB w="6350">
+                      <a:solidFill>
+                        <a:srgbClr val="CBD5E1"/>
+                      </a:solidFill>
+                    </a:lnB>
+                    <a:solidFill>
+                      <a:srgbClr val="F1F5F9"/>
+                    </a:solidFill>
+                  </a:tcPr>
+                </a:tc>
+              </a:tr>
+              <a:tr h="355000">
+                <a:tc>
+                  <a:txBody>
+                    <a:bodyPr/>
+                    <a:lstStyle/>
+                    <a:p>
+                      <a:pPr algn="l"/>
+                      <a:r>
+                        <a:rPr lang="ja-JP" sz="950" b="1" i="0">
+                          <a:solidFill>
+                            <a:srgbClr val="1E2761"/>
+                          </a:solidFill>
+                        </a:rPr>
+                        <a:t>Dynamic Context</a:t>
+                      </a:r>
+                    </a:p>
+                  </a:txBody>
+                  <a:tcPr marL="73152" marR="73152" marT="16000" marB="16000" anchor="ctr">
+                    <a:lnL w="6350">
+                      <a:solidFill>
+                        <a:srgbClr val="CBD5E1"/>
+                      </a:solidFill>
+                    </a:lnL>
+                    <a:lnR w="6350">
+                      <a:solidFill>
+                        <a:srgbClr val="CBD5E1"/>
+                      </a:solidFill>
+                    </a:lnR>
+                    <a:lnT w="6350">
+                      <a:solidFill>
+                        <a:srgbClr val="CBD5E1"/>
+                      </a:solidFill>
+                    </a:lnT>
+                    <a:lnB w="6350">
+                      <a:solidFill>
+                        <a:srgbClr val="CBD5E1"/>
+                      </a:solidFill>
+                    </a:lnB>
+                    <a:solidFill>
+                      <a:srgbClr val="FFFFFF"/>
+                    </a:solidFill>
+                  </a:tcPr>
+                </a:tc>
+                <a:tc>
+                  <a:txBody>
+                    <a:bodyPr/>
+                    <a:lstStyle/>
+                    <a:p>
+                      <a:pPr algn="l"/>
+                      <a:r>
+                        <a:rPr lang="ja-JP" sz="950" b="0" i="0">
+                          <a:solidFill>
+                            <a:srgbClr val="2D3748"/>
+                          </a:solidFill>
+                        </a:rPr>
+                        <a:t>!`fetch_market_snapshot.py` で最新市況を注入してから分析を実行</a:t>
+                      </a:r>
+                    </a:p>
+                  </a:txBody>
+                  <a:tcPr marL="73152" marR="73152" marT="16000" marB="16000" anchor="ctr">
+                    <a:lnL w="6350">
+                      <a:solidFill>
+                        <a:srgbClr val="CBD5E1"/>
+                      </a:solidFill>
+                    </a:lnL>
+                    <a:lnR w="6350">
+                      <a:solidFill>
+                        <a:srgbClr val="CBD5E1"/>
+                      </a:solidFill>
+                    </a:lnR>
+                    <a:lnT w="6350">
+                      <a:solidFill>
+                        <a:srgbClr val="CBD5E1"/>
+                      </a:solidFill>
+                    </a:lnT>
+                    <a:lnB w="6350">
+                      <a:solidFill>
+                        <a:srgbClr val="CBD5E1"/>
+                      </a:solidFill>
+                    </a:lnB>
+                    <a:solidFill>
+                      <a:srgbClr val="FFFFFF"/>
+                    </a:solidFill>
+                  </a:tcPr>
+                </a:tc>
+              </a:tr>
+              <a:tr h="355000">
+                <a:tc>
+                  <a:txBody>
+                    <a:bodyPr/>
+                    <a:lstStyle/>
+                    <a:p>
+                      <a:pPr algn="l"/>
+                      <a:r>
+                        <a:rPr lang="ja-JP" sz="950" b="1" i="0">
+                          <a:solidFill>
+                            <a:srgbClr val="1E2761"/>
+                          </a:solidFill>
+                        </a:rPr>
+                        <a:t>Forked Subagent</a:t>
+                      </a:r>
+                    </a:p>
+                  </a:txBody>
+                  <a:tcPr marL="73152" marR="73152" marT="16000" marB="16000" anchor="ctr">
+                    <a:lnL w="6350">
+                      <a:solidFill>
+                        <a:srgbClr val="CBD5E1"/>
+                      </a:solidFill>
+                    </a:lnL>
+                    <a:lnR w="6350">
+                      <a:solidFill>
+                        <a:srgbClr val="CBD5E1"/>
+                      </a:solidFill>
+                    </a:lnR>
+                    <a:lnT w="6350">
+                      <a:solidFill>
+                        <a:srgbClr val="CBD5E1"/>
+                      </a:solidFill>
+                    </a:lnT>
+                    <a:lnB w="6350">
+                      <a:solidFill>
+                        <a:srgbClr val="CBD5E1"/>
+                      </a:solidFill>
+                    </a:lnB>
+                    <a:solidFill>
+                      <a:srgbClr val="F1F5F9"/>
+                    </a:solidFill>
+                  </a:tcPr>
+                </a:tc>
+                <a:tc>
+                  <a:txBody>
+                    <a:bodyPr/>
+                    <a:lstStyle/>
+                    <a:p>
+                      <a:pPr algn="l"/>
+                      <a:r>
+                        <a:rPr lang="ja-JP" sz="950" b="0" i="0">
+                          <a:solidFill>
+                            <a:srgbClr val="2D3748"/>
+                          </a:solidFill>
+                        </a:rPr>
+                        <a:t>大規模調査やセキュリティレビューを隔離コンテキストで安全に実行</a:t>
+                      </a:r>
+                    </a:p>
+                  </a:txBody>
+                  <a:tcPr marL="73152" marR="73152" marT="16000" marB="16000" anchor="ctr">
+                    <a:lnL w="6350">
+                      <a:solidFill>
+                        <a:srgbClr val="CBD5E1"/>
+                      </a:solidFill>
+                    </a:lnL>
+                    <a:lnR w="6350">
+                      <a:solidFill>
+                        <a:srgbClr val="CBD5E1"/>
+                      </a:solidFill>
+                    </a:lnR>
+                    <a:lnT w="6350">
+                      <a:solidFill>
+                        <a:srgbClr val="CBD5E1"/>
+                      </a:solidFill>
+                    </a:lnT>
+                    <a:lnB w="6350">
+                      <a:solidFill>
+                        <a:srgbClr val="CBD5E1"/>
+                      </a:solidFill>
+                    </a:lnB>
+                    <a:solidFill>
+                      <a:srgbClr val="F1F5F9"/>
+                    </a:solidFill>
+                  </a:tcPr>
+                </a:tc>
+              </a:tr>
+              <a:tr h="355000">
+                <a:tc>
+                  <a:txBody>
+                    <a:bodyPr/>
+                    <a:lstStyle/>
+                    <a:p>
+                      <a:pPr algn="l"/>
+                      <a:r>
+                        <a:rPr lang="ja-JP" sz="950" b="1" i="0">
+                          <a:solidFill>
+                            <a:srgbClr val="1E2761"/>
+                          </a:solidFill>
+                        </a:rPr>
+                        <a:t>Background Knowledge</a:t>
+                      </a:r>
+                    </a:p>
+                  </a:txBody>
+                  <a:tcPr marL="73152" marR="73152" marT="16000" marB="16000" anchor="ctr">
+                    <a:lnL w="6350">
+                      <a:solidFill>
+                        <a:srgbClr val="CBD5E1"/>
+                      </a:solidFill>
+                    </a:lnL>
+                    <a:lnR w="6350">
+                      <a:solidFill>
+                        <a:srgbClr val="CBD5E1"/>
+                      </a:solidFill>
+                    </a:lnR>
+                    <a:lnT w="6350">
+                      <a:solidFill>
+                        <a:srgbClr val="CBD5E1"/>
+                      </a:solidFill>
+                    </a:lnT>
+                    <a:lnB w="6350">
+                      <a:solidFill>
+                        <a:srgbClr val="CBD5E1"/>
+                      </a:solidFill>
+                    </a:lnB>
+                    <a:solidFill>
+                      <a:srgbClr val="FFFFFF"/>
+                    </a:solidFill>
+                  </a:tcPr>
+                </a:tc>
+                <a:tc>
+                  <a:txBody>
+                    <a:bodyPr/>
+                    <a:lstStyle/>
+                    <a:p>
+                      <a:pPr algn="l"/>
+                      <a:r>
+                        <a:rPr lang="ja-JP" sz="950" b="0" i="0">
+                          <a:solidFill>
+                            <a:srgbClr val="2D3748"/>
+                          </a:solidFill>
+                        </a:rPr>
+                        <a:t>レガシー勘定系の仕様・非推奨パターンを常時バックグラウンド注入</a:t>
+                      </a:r>
+                    </a:p>
+                  </a:txBody>
+                  <a:tcPr marL="73152" marR="73152" marT="16000" marB="16000" anchor="ctr">
+                    <a:lnL w="6350">
+                      <a:solidFill>
+                        <a:srgbClr val="CBD5E1"/>
+                      </a:solidFill>
+                    </a:lnL>
+                    <a:lnR w="6350">
+                      <a:solidFill>
+                        <a:srgbClr val="CBD5E1"/>
+                      </a:solidFill>
+                    </a:lnR>
+                    <a:lnT w="6350">
+                      <a:solidFill>
+                        <a:srgbClr val="CBD5E1"/>
+                      </a:solidFill>
+                    </a:lnT>
+                    <a:lnB w="6350">
+                      <a:solidFill>
+                        <a:srgbClr val="CBD5E1"/>
+                      </a:solidFill>
+                    </a:lnB>
+                    <a:solidFill>
+                      <a:srgbClr val="FFFFFF"/>
+                    </a:solidFill>
+                  </a:tcPr>
+                </a:tc>
+              </a:tr>
+              <a:tr h="355000">
+                <a:tc>
+                  <a:txBody>
+                    <a:bodyPr/>
+                    <a:lstStyle/>
+                    <a:p>
+                      <a:pPr algn="l"/>
+                      <a:r>
+                        <a:rPr lang="ja-JP" sz="950" b="1" i="0">
+                          <a:solidFill>
+                            <a:srgbClr val="1E2761"/>
+                          </a:solidFill>
+                        </a:rPr>
+                        <a:t>Meta Skill</a:t>
+                      </a:r>
+                    </a:p>
+                  </a:txBody>
+                  <a:tcPr marL="73152" marR="73152" marT="16000" marB="16000" anchor="ctr">
+                    <a:lnL w="6350">
+                      <a:solidFill>
+                        <a:srgbClr val="CBD5E1"/>
+                      </a:solidFill>
+                    </a:lnL>
+                    <a:lnR w="6350">
+                      <a:solidFill>
+                        <a:srgbClr val="CBD5E1"/>
+                      </a:solidFill>
+                    </a:lnR>
+                    <a:lnT w="6350">
+                      <a:solidFill>
+                        <a:srgbClr val="CBD5E1"/>
+                      </a:solidFill>
+                    </a:lnT>
+                    <a:lnB w="6350">
+                      <a:solidFill>
+                        <a:srgbClr val="CBD5E1"/>
+                      </a:solidFill>
+                    </a:lnB>
+                    <a:solidFill>
+                      <a:srgbClr val="F1F5F9"/>
+                    </a:solidFill>
+                  </a:tcPr>
+                </a:tc>
+                <a:tc>
+                  <a:txBody>
+                    <a:bodyPr/>
+                    <a:lstStyle/>
+                    <a:p>
+                      <a:pPr algn="l"/>
+                      <a:r>
+                        <a:rPr lang="ja-JP" sz="950" b="0" i="0">
+                          <a:solidFill>
+                            <a:srgbClr val="2D3748"/>
+                          </a:solidFill>
+                        </a:rPr>
+                        <a:t>チームSkill を評価ループ（あり/なし比較）で品質担保し誤発動を削減</a:t>
+                      </a:r>
+                    </a:p>
+                  </a:txBody>
+                  <a:tcPr marL="73152" marR="73152" marT="16000" marB="16000" anchor="ctr">
+                    <a:lnL w="6350">
+                      <a:solidFill>
+                        <a:srgbClr val="CBD5E1"/>
+                      </a:solidFill>
+                    </a:lnL>
+                    <a:lnR w="6350">
+                      <a:solidFill>
+                        <a:srgbClr val="CBD5E1"/>
+                      </a:solidFill>
+                    </a:lnR>
+                    <a:lnT w="6350">
+                      <a:solidFill>
+                        <a:srgbClr val="CBD5E1"/>
+                      </a:solidFill>
+                    </a:lnT>
+                    <a:lnB w="6350">
+                      <a:solidFill>
+                        <a:srgbClr val="CBD5E1"/>
+                      </a:solidFill>
+                    </a:lnB>
+                    <a:solidFill>
+                      <a:srgbClr val="F1F5F9"/>
+                    </a:solidFill>
+                  </a:tcPr>
+                </a:tc>
+              </a:tr>
+            </a:tbl>
+          </a:graphicData>
+        </a:graphic>
+      </p:graphicFrame>
+      <p:sp>
+        <p:nvSpPr>
+          <p:cNvPr id="30" name="dots"/>
+          <p:cNvSpPr txBox="1"/>
+          <p:nvPr/>
+        </p:nvSpPr>
+        <p:spPr>
+          <a:xfrm>
+            <a:off x="5486400" y="4828032"/>
+            <a:ext cx="3474720" cy="228600"/>
+          </a:xfrm>
+          <a:prstGeom prst="rect">
+            <a:avLst/>
+          </a:prstGeom>
+          <a:noFill/>
+        </p:spPr>
+        <p:txBody>
+          <a:bodyPr wrap="square" lIns="0" rIns="0" tIns="0" bIns="0">
+            <a:spAutoFit/>
+          </a:bodyPr>
+          <a:lstStyle/>
+          <a:p>
+            <a:r>
+              <a:rPr lang="ja-JP" sz="1000" b="0" i="0">
+                <a:solidFill>
+                  <a:srgbClr val="64748B"/>
+                </a:solidFill>
+              </a:rPr>
+              <a:t>● ● ● ● ● ● ● ○ ○ ○ ○</a:t>
+            </a:r>
+          </a:p>
+        </p:txBody>
+      </p:sp>
+    </p:spTree>
+  </p:cSld>
+  <p:clrMapOvr>
+    <a:masterClrMapping/>
+  </p:clrMapOvr>
+</p:sld>
+</file>
+
+<file path=ppt/slides/slide17.xml><?xml version="1.0" encoding="utf-8"?>
+<p:sld xmlns:a="http://schemas.openxmlformats.org/drawingml/2006/main" xmlns:p="http://schemas.openxmlformats.org/presentationml/2006/main" xmlns:r="http://schemas.openxmlformats.org/officeDocument/2006/relationships">
+  <p:cSld>
+    <p:bg>
+      <p:bgPr>
+        <a:solidFill>
+          <a:srgbClr val="FFFFFF"/>
+        </a:solidFill>
+        <a:effectLst/>
+      </p:bgPr>
+    </p:bg>
+    <p:spTree>
+      <p:nvGrpSpPr>
+        <p:cNvPr id="1" name=""/>
+        <p:cNvGrpSpPr/>
+        <p:nvPr/>
+      </p:nvGrpSpPr>
+      <p:grpSpPr/>
+      <p:sp>
+        <p:nvSpPr>
+          <p:cNvPr id="2" name="title"/>
+          <p:cNvSpPr txBox="1"/>
+          <p:nvPr/>
+        </p:nvSpPr>
+        <p:spPr>
+          <a:xfrm>
+            <a:off x="457200" y="320040"/>
+            <a:ext cx="8229600" cy="548640"/>
+          </a:xfrm>
+          <a:prstGeom prst="rect">
+            <a:avLst/>
+          </a:prstGeom>
+          <a:noFill/>
+        </p:spPr>
+        <p:txBody>
+          <a:bodyPr wrap="square" lIns="0" rIns="0" tIns="0" bIns="0">
+            <a:spAutoFit/>
+          </a:bodyPr>
+          <a:lstStyle/>
+          <a:p>
+            <a:r>
+              <a:rPr lang="ja-JP" sz="2400" b="1" i="0">
+                <a:solidFill>
+                  <a:srgbClr val="1E2761"/>
+                </a:solidFill>
+              </a:rPr>
+              <a:t>SubAgents ― システム開発でのユースケース</a:t>
+            </a:r>
+          </a:p>
+        </p:txBody>
+      </p:sp>
+      <p:sp>
+        <p:nvSpPr>
+          <p:cNvPr id="3" name="sub"/>
+          <p:cNvSpPr txBox="1"/>
+          <p:nvPr/>
+        </p:nvSpPr>
+        <p:spPr>
+          <a:xfrm>
+            <a:off x="457200" y="960000"/>
+            <a:ext cx="8229600" cy="330000"/>
+          </a:xfrm>
+          <a:prstGeom prst="rect">
+            <a:avLst/>
+          </a:prstGeom>
+          <a:noFill/>
+        </p:spPr>
+        <p:txBody>
+          <a:bodyPr wrap="square" lIns="0" rIns="0" tIns="0" bIns="0">
+            <a:spAutoFit/>
+          </a:bodyPr>
+          <a:lstStyle/>
+          <a:p>
+            <a:r>
+              <a:rPr lang="ja-JP" sz="1300" b="0" i="1">
+                <a:solidFill>
+                  <a:srgbClr val="64748B"/>
+                </a:solidFill>
+              </a:rPr>
+              <a:t>同一セッション内で専門役を並列に分け、独立コンテキストで実行して本体に報告する</a:t>
+            </a:r>
+          </a:p>
+        </p:txBody>
+      </p:sp>
+      <p:graphicFrame>
+        <p:nvGraphicFramePr>
+          <p:cNvPr id="20" name="Table"/>
+          <p:cNvGraphicFramePr/>
+          <p:nvPr/>
+        </p:nvGraphicFramePr>
+        <p:xfrm>
+          <a:off x="457200" y="1380000"/>
+          <a:ext cx="8229600" cy="100000"/>
+        </p:xfrm>
+        <a:graphic>
+          <a:graphicData uri="http://schemas.openxmlformats.org/drawingml/2006/table">
+            <a:tbl>
+              <a:tblPr firstRow="1" bandRow="0"/>
+              <a:tblGrid>
+                <a:gridCol w="2200000"/>
+                <a:gridCol w="3700000"/>
+                <a:gridCol w="2329600"/>
+              </a:tblGrid>
+              <a:tr h="320000">
+                <a:tc>
+                  <a:txBody>
+                    <a:bodyPr/>
+                    <a:lstStyle/>
+                    <a:p>
+                      <a:pPr algn="l"/>
+                      <a:r>
+                        <a:rPr lang="ja-JP" sz="1000" b="1" i="0">
+                          <a:solidFill>
+                            <a:srgbClr val="FFFFFF"/>
+                          </a:solidFill>
+                        </a:rPr>
+                        <a:t>ユースケース</a:t>
+                      </a:r>
+                    </a:p>
+                  </a:txBody>
+                  <a:tcPr marL="73152" marR="73152" marT="16000" marB="16000" anchor="ctr">
+                    <a:lnL w="6350">
+                      <a:solidFill>
+                        <a:srgbClr val="CBD5E1"/>
+                      </a:solidFill>
+                    </a:lnL>
+                    <a:lnR w="6350">
+                      <a:solidFill>
+                        <a:srgbClr val="CBD5E1"/>
+                      </a:solidFill>
+                    </a:lnR>
+                    <a:lnT w="6350">
+                      <a:solidFill>
+                        <a:srgbClr val="CBD5E1"/>
+                      </a:solidFill>
+                    </a:lnT>
+                    <a:lnB w="6350">
+                      <a:solidFill>
+                        <a:srgbClr val="CBD5E1"/>
+                      </a:solidFill>
+                    </a:lnB>
+                    <a:solidFill>
+                      <a:srgbClr val="1E2761"/>
+                    </a:solidFill>
+                  </a:tcPr>
+                </a:tc>
+                <a:tc>
+                  <a:txBody>
+                    <a:bodyPr/>
+                    <a:lstStyle/>
+                    <a:p>
+                      <a:pPr algn="l"/>
+                      <a:r>
+                        <a:rPr lang="ja-JP" sz="1000" b="1" i="0">
+                          <a:solidFill>
+                            <a:srgbClr val="FFFFFF"/>
+                          </a:solidFill>
+                        </a:rPr>
+                        <a:t>SubAgent の分け方</a:t>
+                      </a:r>
+                    </a:p>
+                  </a:txBody>
+                  <a:tcPr marL="73152" marR="73152" marT="16000" marB="16000" anchor="ctr">
+                    <a:lnL w="6350">
+                      <a:solidFill>
+                        <a:srgbClr val="CBD5E1"/>
+                      </a:solidFill>
+                    </a:lnL>
+                    <a:lnR w="6350">
+                      <a:solidFill>
+                        <a:srgbClr val="CBD5E1"/>
+                      </a:solidFill>
+                    </a:lnR>
+                    <a:lnT w="6350">
+                      <a:solidFill>
+                        <a:srgbClr val="CBD5E1"/>
+                      </a:solidFill>
+                    </a:lnT>
+                    <a:lnB w="6350">
+                      <a:solidFill>
+                        <a:srgbClr val="CBD5E1"/>
+                      </a:solidFill>
+                    </a:lnB>
+                    <a:solidFill>
+                      <a:srgbClr val="1E2761"/>
+                    </a:solidFill>
+                  </a:tcPr>
+                </a:tc>
+                <a:tc>
+                  <a:txBody>
+                    <a:bodyPr/>
+                    <a:lstStyle/>
+                    <a:p>
+                      <a:pPr algn="l"/>
+                      <a:r>
+                        <a:rPr lang="ja-JP" sz="1000" b="1" i="0">
+                          <a:solidFill>
+                            <a:srgbClr val="FFFFFF"/>
+                          </a:solidFill>
+                        </a:rPr>
+                        <a:t>効果</a:t>
+                      </a:r>
+                    </a:p>
+                  </a:txBody>
+                  <a:tcPr marL="73152" marR="73152" marT="16000" marB="16000" anchor="ctr">
+                    <a:lnL w="6350">
+                      <a:solidFill>
+                        <a:srgbClr val="CBD5E1"/>
+                      </a:solidFill>
+                    </a:lnL>
+                    <a:lnR w="6350">
+                      <a:solidFill>
+                        <a:srgbClr val="CBD5E1"/>
+                      </a:solidFill>
+                    </a:lnR>
+                    <a:lnT w="6350">
+                      <a:solidFill>
+                        <a:srgbClr val="CBD5E1"/>
+                      </a:solidFill>
+                    </a:lnT>
+                    <a:lnB w="6350">
+                      <a:solidFill>
+                        <a:srgbClr val="CBD5E1"/>
+                      </a:solidFill>
+                    </a:lnB>
+                    <a:solidFill>
+                      <a:srgbClr val="1E2761"/>
+                    </a:solidFill>
+                  </a:tcPr>
+                </a:tc>
+              </a:tr>
+              <a:tr h="350000">
+                <a:tc>
+                  <a:txBody>
+                    <a:bodyPr/>
+                    <a:lstStyle/>
+                    <a:p>
+                      <a:pPr algn="l"/>
+                      <a:r>
+                        <a:rPr lang="ja-JP" sz="950" b="1" i="0">
+                          <a:solidFill>
+                            <a:srgbClr val="1E2761"/>
+                          </a:solidFill>
+                        </a:rPr>
+                        <a:t>並列コードレビュー</a:t>
+                      </a:r>
+                    </a:p>
+                  </a:txBody>
+                  <a:tcPr marL="73152" marR="73152" marT="16000" marB="16000" anchor="ctr">
+                    <a:lnL w="6350">
+                      <a:solidFill>
+                        <a:srgbClr val="CBD5E1"/>
+                      </a:solidFill>
+                    </a:lnL>
+                    <a:lnR w="6350">
+                      <a:solidFill>
+                        <a:srgbClr val="CBD5E1"/>
+                      </a:solidFill>
+                    </a:lnR>
+                    <a:lnT w="6350">
+                      <a:solidFill>
+                        <a:srgbClr val="CBD5E1"/>
+                      </a:solidFill>
+                    </a:lnT>
+                    <a:lnB w="6350">
+                      <a:solidFill>
+                        <a:srgbClr val="CBD5E1"/>
+                      </a:solidFill>
+                    </a:lnB>
+                    <a:solidFill>
+                      <a:srgbClr val="FFFFFF"/>
+                    </a:solidFill>
+                  </a:tcPr>
+                </a:tc>
+                <a:tc>
+                  <a:txBody>
+                    <a:bodyPr/>
+                    <a:lstStyle/>
+                    <a:p>
+                      <a:pPr algn="l"/>
+                      <a:r>
+                        <a:rPr lang="ja-JP" sz="950" b="0" i="0">
+                          <a:solidFill>
+                            <a:srgbClr val="2D3748"/>
+                          </a:solidFill>
+                        </a:rPr>
+                        <a:t>セキュリティ / 性能 / 規約を観点別に並列レビュー</a:t>
+                      </a:r>
+                    </a:p>
+                  </a:txBody>
+                  <a:tcPr marL="73152" marR="73152" marT="16000" marB="16000" anchor="ctr">
+                    <a:lnL w="6350">
+                      <a:solidFill>
+                        <a:srgbClr val="CBD5E1"/>
+                      </a:solidFill>
+                    </a:lnL>
+                    <a:lnR w="6350">
+                      <a:solidFill>
+                        <a:srgbClr val="CBD5E1"/>
+                      </a:solidFill>
+                    </a:lnR>
+                    <a:lnT w="6350">
+                      <a:solidFill>
+                        <a:srgbClr val="CBD5E1"/>
+                      </a:solidFill>
+                    </a:lnT>
+                    <a:lnB w="6350">
+                      <a:solidFill>
+                        <a:srgbClr val="CBD5E1"/>
+                      </a:solidFill>
+                    </a:lnB>
+                    <a:solidFill>
+                      <a:srgbClr val="FFFFFF"/>
+                    </a:solidFill>
+                  </a:tcPr>
+                </a:tc>
+                <a:tc>
+                  <a:txBody>
+                    <a:bodyPr/>
+                    <a:lstStyle/>
+                    <a:p>
+                      <a:pPr algn="l"/>
+                      <a:r>
+                        <a:rPr lang="ja-JP" sz="950" b="0" i="0">
+                          <a:solidFill>
+                            <a:srgbClr val="2D3748"/>
+                          </a:solidFill>
+                        </a:rPr>
+                        <a:t>観点ごとに専門化し見落としを削減</a:t>
+                      </a:r>
+                    </a:p>
+                  </a:txBody>
+                  <a:tcPr marL="73152" marR="73152" marT="16000" marB="16000" anchor="ctr">
+                    <a:lnL w="6350">
+                      <a:solidFill>
+                        <a:srgbClr val="CBD5E1"/>
+                      </a:solidFill>
+                    </a:lnL>
+                    <a:lnR w="6350">
+                      <a:solidFill>
+                        <a:srgbClr val="CBD5E1"/>
+                      </a:solidFill>
+                    </a:lnR>
+                    <a:lnT w="6350">
+                      <a:solidFill>
+                        <a:srgbClr val="CBD5E1"/>
+                      </a:solidFill>
+                    </a:lnT>
+                    <a:lnB w="6350">
+                      <a:solidFill>
+                        <a:srgbClr val="CBD5E1"/>
+                      </a:solidFill>
+                    </a:lnB>
+                    <a:solidFill>
+                      <a:srgbClr val="FFFFFF"/>
+                    </a:solidFill>
+                  </a:tcPr>
+                </a:tc>
+              </a:tr>
+              <a:tr h="350000">
+                <a:tc>
+                  <a:txBody>
+                    <a:bodyPr/>
+                    <a:lstStyle/>
+                    <a:p>
+                      <a:pPr algn="l"/>
+                      <a:r>
+                        <a:rPr lang="ja-JP" sz="950" b="1" i="0">
+                          <a:solidFill>
+                            <a:srgbClr val="1E2761"/>
+                          </a:solidFill>
+                        </a:rPr>
+                        <a:t>大規模リファクタリング</a:t>
+                      </a:r>
+                    </a:p>
+                  </a:txBody>
+                  <a:tcPr marL="73152" marR="73152" marT="16000" marB="16000" anchor="ctr">
+                    <a:lnL w="6350">
+                      <a:solidFill>
+                        <a:srgbClr val="CBD5E1"/>
+                      </a:solidFill>
+                    </a:lnL>
+                    <a:lnR w="6350">
+                      <a:solidFill>
+                        <a:srgbClr val="CBD5E1"/>
+                      </a:solidFill>
+                    </a:lnR>
+                    <a:lnT w="6350">
+                      <a:solidFill>
+                        <a:srgbClr val="CBD5E1"/>
+                      </a:solidFill>
+                    </a:lnT>
+                    <a:lnB w="6350">
+                      <a:solidFill>
+                        <a:srgbClr val="CBD5E1"/>
+                      </a:solidFill>
+                    </a:lnB>
+                    <a:solidFill>
+                      <a:srgbClr val="F1F5F9"/>
+                    </a:solidFill>
+                  </a:tcPr>
+                </a:tc>
+                <a:tc>
+                  <a:txBody>
+                    <a:bodyPr/>
+                    <a:lstStyle/>
+                    <a:p>
+                      <a:pPr algn="l"/>
+                      <a:r>
+                        <a:rPr lang="ja-JP" sz="950" b="0" i="0">
+                          <a:solidFill>
+                            <a:srgbClr val="2D3748"/>
+                          </a:solidFill>
+                        </a:rPr>
+                        <a:t>パッケージ単位に分割し独立コンテキストで並列改修</a:t>
+                      </a:r>
+                    </a:p>
+                  </a:txBody>
+                  <a:tcPr marL="73152" marR="73152" marT="16000" marB="16000" anchor="ctr">
+                    <a:lnL w="6350">
+                      <a:solidFill>
+                        <a:srgbClr val="CBD5E1"/>
+                      </a:solidFill>
+                    </a:lnL>
+                    <a:lnR w="6350">
+                      <a:solidFill>
+                        <a:srgbClr val="CBD5E1"/>
+                      </a:solidFill>
+                    </a:lnR>
+                    <a:lnT w="6350">
+                      <a:solidFill>
+                        <a:srgbClr val="CBD5E1"/>
+                      </a:solidFill>
+                    </a:lnT>
+                    <a:lnB w="6350">
+                      <a:solidFill>
+                        <a:srgbClr val="CBD5E1"/>
+                      </a:solidFill>
+                    </a:lnB>
+                    <a:solidFill>
+                      <a:srgbClr val="F1F5F9"/>
+                    </a:solidFill>
+                  </a:tcPr>
+                </a:tc>
+                <a:tc>
+                  <a:txBody>
+                    <a:bodyPr/>
+                    <a:lstStyle/>
+                    <a:p>
+                      <a:pPr algn="l"/>
+                      <a:r>
+                        <a:rPr lang="ja-JP" sz="950" b="0" i="0">
+                          <a:solidFill>
+                            <a:srgbClr val="2D3748"/>
+                          </a:solidFill>
+                        </a:rPr>
+                        <a:t>コンテキスト肥大を回避し高速化</a:t>
+                      </a:r>
+                    </a:p>
+                  </a:txBody>
+                  <a:tcPr marL="73152" marR="73152" marT="16000" marB="16000" anchor="ctr">
+                    <a:lnL w="6350">
+                      <a:solidFill>
+                        <a:srgbClr val="CBD5E1"/>
+                      </a:solidFill>
+                    </a:lnL>
+                    <a:lnR w="6350">
+                      <a:solidFill>
+                        <a:srgbClr val="CBD5E1"/>
+                      </a:solidFill>
+                    </a:lnR>
+                    <a:lnT w="6350">
+                      <a:solidFill>
+                        <a:srgbClr val="CBD5E1"/>
+                      </a:solidFill>
+                    </a:lnT>
+                    <a:lnB w="6350">
+                      <a:solidFill>
+                        <a:srgbClr val="CBD5E1"/>
+                      </a:solidFill>
+                    </a:lnB>
+                    <a:solidFill>
+                      <a:srgbClr val="F1F5F9"/>
+                    </a:solidFill>
+                  </a:tcPr>
+                </a:tc>
+              </a:tr>
+              <a:tr h="350000">
+                <a:tc>
+                  <a:txBody>
+                    <a:bodyPr/>
+                    <a:lstStyle/>
+                    <a:p>
+                      <a:pPr algn="l"/>
+                      <a:r>
+                        <a:rPr lang="ja-JP" sz="950" b="1" i="0">
+                          <a:solidFill>
+                            <a:srgbClr val="1E2761"/>
+                          </a:solidFill>
+                        </a:rPr>
+                        <a:t>テスト生成と実行</a:t>
+                      </a:r>
+                    </a:p>
+                  </a:txBody>
+                  <a:tcPr marL="73152" marR="73152" marT="16000" marB="16000" anchor="ctr">
+                    <a:lnL w="6350">
+                      <a:solidFill>
+                        <a:srgbClr val="CBD5E1"/>
+                      </a:solidFill>
+                    </a:lnL>
+                    <a:lnR w="6350">
+                      <a:solidFill>
+                        <a:srgbClr val="CBD5E1"/>
+                      </a:solidFill>
+                    </a:lnR>
+                    <a:lnT w="6350">
+                      <a:solidFill>
+                        <a:srgbClr val="CBD5E1"/>
+                      </a:solidFill>
+                    </a:lnT>
+                    <a:lnB w="6350">
+                      <a:solidFill>
+                        <a:srgbClr val="CBD5E1"/>
+                      </a:solidFill>
+                    </a:lnB>
+                    <a:solidFill>
+                      <a:srgbClr val="FFFFFF"/>
+                    </a:solidFill>
+                  </a:tcPr>
+                </a:tc>
+                <a:tc>
+                  <a:txBody>
+                    <a:bodyPr/>
+                    <a:lstStyle/>
+                    <a:p>
+                      <a:pPr algn="l"/>
+                      <a:r>
+                        <a:rPr lang="ja-JP" sz="950" b="0" i="0">
+                          <a:solidFill>
+                            <a:srgbClr val="2D3748"/>
+                          </a:solidFill>
+                        </a:rPr>
+                        <a:t>実装役とは別の SubAgent がテストを作成・実行</a:t>
+                      </a:r>
+                    </a:p>
+                  </a:txBody>
+                  <a:tcPr marL="73152" marR="73152" marT="16000" marB="16000" anchor="ctr">
+                    <a:lnL w="6350">
+                      <a:solidFill>
+                        <a:srgbClr val="CBD5E1"/>
+                      </a:solidFill>
+                    </a:lnL>
+                    <a:lnR w="6350">
+                      <a:solidFill>
+                        <a:srgbClr val="CBD5E1"/>
+                      </a:solidFill>
+                    </a:lnR>
+                    <a:lnT w="6350">
+                      <a:solidFill>
+                        <a:srgbClr val="CBD5E1"/>
+                      </a:solidFill>
+                    </a:lnT>
+                    <a:lnB w="6350">
+                      <a:solidFill>
+                        <a:srgbClr val="CBD5E1"/>
+                      </a:solidFill>
+                    </a:lnB>
+                    <a:solidFill>
+                      <a:srgbClr val="FFFFFF"/>
+                    </a:solidFill>
+                  </a:tcPr>
+                </a:tc>
+                <a:tc>
+                  <a:txBody>
+                    <a:bodyPr/>
+                    <a:lstStyle/>
+                    <a:p>
+                      <a:pPr algn="l"/>
+                      <a:r>
+                        <a:rPr lang="ja-JP" sz="950" b="0" i="0">
+                          <a:solidFill>
+                            <a:srgbClr val="2D3748"/>
+                          </a:solidFill>
+                        </a:rPr>
+                        <a:t>実装者バイアスを排除</a:t>
+                      </a:r>
+                    </a:p>
+                  </a:txBody>
+                  <a:tcPr marL="73152" marR="73152" marT="16000" marB="16000" anchor="ctr">
+                    <a:lnL w="6350">
+                      <a:solidFill>
+                        <a:srgbClr val="CBD5E1"/>
+                      </a:solidFill>
+                    </a:lnL>
+                    <a:lnR w="6350">
+                      <a:solidFill>
+                        <a:srgbClr val="CBD5E1"/>
+                      </a:solidFill>
+                    </a:lnR>
+                    <a:lnT w="6350">
+                      <a:solidFill>
+                        <a:srgbClr val="CBD5E1"/>
+                      </a:solidFill>
+                    </a:lnT>
+                    <a:lnB w="6350">
+                      <a:solidFill>
+                        <a:srgbClr val="CBD5E1"/>
+                      </a:solidFill>
+                    </a:lnB>
+                    <a:solidFill>
+                      <a:srgbClr val="FFFFFF"/>
+                    </a:solidFill>
+                  </a:tcPr>
+                </a:tc>
+              </a:tr>
+              <a:tr h="350000">
+                <a:tc>
+                  <a:txBody>
+                    <a:bodyPr/>
+                    <a:lstStyle/>
+                    <a:p>
+                      <a:pPr algn="l"/>
+                      <a:r>
+                        <a:rPr lang="ja-JP" sz="950" b="1" i="0">
+                          <a:solidFill>
+                            <a:srgbClr val="1E2761"/>
+                          </a:solidFill>
+                        </a:rPr>
+                        <a:t>移行前の影響範囲調査</a:t>
+                      </a:r>
+                    </a:p>
+                  </a:txBody>
+                  <a:tcPr marL="73152" marR="73152" marT="16000" marB="16000" anchor="ctr">
+                    <a:lnL w="6350">
+                      <a:solidFill>
+                        <a:srgbClr val="CBD5E1"/>
+                      </a:solidFill>
+                    </a:lnL>
+                    <a:lnR w="6350">
+                      <a:solidFill>
+                        <a:srgbClr val="CBD5E1"/>
+                      </a:solidFill>
+                    </a:lnR>
+                    <a:lnT w="6350">
+                      <a:solidFill>
+                        <a:srgbClr val="CBD5E1"/>
+                      </a:solidFill>
+                    </a:lnT>
+                    <a:lnB w="6350">
+                      <a:solidFill>
+                        <a:srgbClr val="CBD5E1"/>
+                      </a:solidFill>
+                    </a:lnB>
+                    <a:solidFill>
+                      <a:srgbClr val="F1F5F9"/>
+                    </a:solidFill>
+                  </a:tcPr>
+                </a:tc>
+                <a:tc>
+                  <a:txBody>
+                    <a:bodyPr/>
+                    <a:lstStyle/>
+                    <a:p>
+                      <a:pPr algn="l"/>
+                      <a:r>
+                        <a:rPr lang="ja-JP" sz="950" b="0" i="0">
+                          <a:solidFill>
+                            <a:srgbClr val="2D3748"/>
+                          </a:solidFill>
+                        </a:rPr>
+                        <a:t>Explore agent で隔離調査し、本体は汚さない</a:t>
+                      </a:r>
+                    </a:p>
+                  </a:txBody>
+                  <a:tcPr marL="73152" marR="73152" marT="16000" marB="16000" anchor="ctr">
+                    <a:lnL w="6350">
+                      <a:solidFill>
+                        <a:srgbClr val="CBD5E1"/>
+                      </a:solidFill>
+                    </a:lnL>
+                    <a:lnR w="6350">
+                      <a:solidFill>
+                        <a:srgbClr val="CBD5E1"/>
+                      </a:solidFill>
+                    </a:lnR>
+                    <a:lnT w="6350">
+                      <a:solidFill>
+                        <a:srgbClr val="CBD5E1"/>
+                      </a:solidFill>
+                    </a:lnT>
+                    <a:lnB w="6350">
+                      <a:solidFill>
+                        <a:srgbClr val="CBD5E1"/>
+                      </a:solidFill>
+                    </a:lnB>
+                    <a:solidFill>
+                      <a:srgbClr val="F1F5F9"/>
+                    </a:solidFill>
+                  </a:tcPr>
+                </a:tc>
+                <a:tc>
+                  <a:txBody>
+                    <a:bodyPr/>
+                    <a:lstStyle/>
+                    <a:p>
+                      <a:pPr algn="l"/>
+                      <a:r>
+                        <a:rPr lang="ja-JP" sz="950" b="0" i="0">
+                          <a:solidFill>
+                            <a:srgbClr val="2D3748"/>
+                          </a:solidFill>
+                        </a:rPr>
+                        <a:t>調査ノイズを本流に持ち込まない</a:t>
+                      </a:r>
+                    </a:p>
+                  </a:txBody>
+                  <a:tcPr marL="73152" marR="73152" marT="16000" marB="16000" anchor="ctr">
+                    <a:lnL w="6350">
+                      <a:solidFill>
+                        <a:srgbClr val="CBD5E1"/>
+                      </a:solidFill>
+                    </a:lnL>
+                    <a:lnR w="6350">
+                      <a:solidFill>
+                        <a:srgbClr val="CBD5E1"/>
+                      </a:solidFill>
+                    </a:lnR>
+                    <a:lnT w="6350">
+                      <a:solidFill>
+                        <a:srgbClr val="CBD5E1"/>
+                      </a:solidFill>
+                    </a:lnT>
+                    <a:lnB w="6350">
+                      <a:solidFill>
+                        <a:srgbClr val="CBD5E1"/>
+                      </a:solidFill>
+                    </a:lnB>
+                    <a:solidFill>
+                      <a:srgbClr val="F1F5F9"/>
+                    </a:solidFill>
+                  </a:tcPr>
+                </a:tc>
+              </a:tr>
+              <a:tr h="350000">
+                <a:tc>
+                  <a:txBody>
+                    <a:bodyPr/>
+                    <a:lstStyle/>
+                    <a:p>
+                      <a:pPr algn="l"/>
+                      <a:r>
+                        <a:rPr lang="ja-JP" sz="950" b="1" i="0">
+                          <a:solidFill>
+                            <a:srgbClr val="1E2761"/>
+                          </a:solidFill>
+                        </a:rPr>
+                        <a:t>障害調査（ログ横断）</a:t>
+                      </a:r>
+                    </a:p>
+                  </a:txBody>
+                  <a:tcPr marL="73152" marR="73152" marT="16000" marB="16000" anchor="ctr">
+                    <a:lnL w="6350">
+                      <a:solidFill>
+                        <a:srgbClr val="CBD5E1"/>
+                      </a:solidFill>
+                    </a:lnL>
+                    <a:lnR w="6350">
+                      <a:solidFill>
+                        <a:srgbClr val="CBD5E1"/>
+                      </a:solidFill>
+                    </a:lnR>
+                    <a:lnT w="6350">
+                      <a:solidFill>
+                        <a:srgbClr val="CBD5E1"/>
+                      </a:solidFill>
+                    </a:lnT>
+                    <a:lnB w="6350">
+                      <a:solidFill>
+                        <a:srgbClr val="CBD5E1"/>
+                      </a:solidFill>
+                    </a:lnB>
+                    <a:solidFill>
+                      <a:srgbClr val="FFFFFF"/>
+                    </a:solidFill>
+                  </a:tcPr>
+                </a:tc>
+                <a:tc>
+                  <a:txBody>
+                    <a:bodyPr/>
+                    <a:lstStyle/>
+                    <a:p>
+                      <a:pPr algn="l"/>
+                      <a:r>
+                        <a:rPr lang="ja-JP" sz="950" b="0" i="0">
+                          <a:solidFill>
+                            <a:srgbClr val="2D3748"/>
+                          </a:solidFill>
+                        </a:rPr>
+                        <a:t>複数ログ源を分担解析し原因候補を報告</a:t>
+                      </a:r>
+                    </a:p>
+                  </a:txBody>
+                  <a:tcPr marL="73152" marR="73152" marT="16000" marB="16000" anchor="ctr">
+                    <a:lnL w="6350">
+                      <a:solidFill>
+                        <a:srgbClr val="CBD5E1"/>
+                      </a:solidFill>
+                    </a:lnL>
+                    <a:lnR w="6350">
+                      <a:solidFill>
+                        <a:srgbClr val="CBD5E1"/>
+                      </a:solidFill>
+                    </a:lnR>
+                    <a:lnT w="6350">
+                      <a:solidFill>
+                        <a:srgbClr val="CBD5E1"/>
+                      </a:solidFill>
+                    </a:lnT>
+                    <a:lnB w="6350">
+                      <a:solidFill>
+                        <a:srgbClr val="CBD5E1"/>
+                      </a:solidFill>
+                    </a:lnB>
+                    <a:solidFill>
+                      <a:srgbClr val="FFFFFF"/>
+                    </a:solidFill>
+                  </a:tcPr>
+                </a:tc>
+                <a:tc>
+                  <a:txBody>
+                    <a:bodyPr/>
+                    <a:lstStyle/>
+                    <a:p>
+                      <a:pPr algn="l"/>
+                      <a:r>
+                        <a:rPr lang="ja-JP" sz="950" b="0" i="0">
+                          <a:solidFill>
+                            <a:srgbClr val="2D3748"/>
+                          </a:solidFill>
+                        </a:rPr>
+                        <a:t>並列で切り分けを短縮</a:t>
+                      </a:r>
+                    </a:p>
+                  </a:txBody>
+                  <a:tcPr marL="73152" marR="73152" marT="16000" marB="16000" anchor="ctr">
+                    <a:lnL w="6350">
+                      <a:solidFill>
+                        <a:srgbClr val="CBD5E1"/>
+                      </a:solidFill>
+                    </a:lnL>
+                    <a:lnR w="6350">
+                      <a:solidFill>
+                        <a:srgbClr val="CBD5E1"/>
+                      </a:solidFill>
+                    </a:lnR>
+                    <a:lnT w="6350">
+                      <a:solidFill>
+                        <a:srgbClr val="CBD5E1"/>
+                      </a:solidFill>
+                    </a:lnT>
+                    <a:lnB w="6350">
+                      <a:solidFill>
+                        <a:srgbClr val="CBD5E1"/>
+                      </a:solidFill>
+                    </a:lnB>
+                    <a:solidFill>
+                      <a:srgbClr val="FFFFFF"/>
+                    </a:solidFill>
+                  </a:tcPr>
+                </a:tc>
+              </a:tr>
+              <a:tr h="350000">
+                <a:tc>
+                  <a:txBody>
+                    <a:bodyPr/>
+                    <a:lstStyle/>
+                    <a:p>
+                      <a:pPr algn="l"/>
+                      <a:r>
+                        <a:rPr lang="ja-JP" sz="950" b="1" i="0">
+                          <a:solidFill>
+                            <a:srgbClr val="1E2761"/>
+                          </a:solidFill>
+                        </a:rPr>
+                        <a:t>ドキュメント追従更新</a:t>
+                      </a:r>
+                    </a:p>
+                  </a:txBody>
+                  <a:tcPr marL="73152" marR="73152" marT="16000" marB="16000" anchor="ctr">
+                    <a:lnL w="6350">
+                      <a:solidFill>
+                        <a:srgbClr val="CBD5E1"/>
+                      </a:solidFill>
+                    </a:lnL>
+                    <a:lnR w="6350">
+                      <a:solidFill>
+                        <a:srgbClr val="CBD5E1"/>
+                      </a:solidFill>
+                    </a:lnR>
+                    <a:lnT w="6350">
+                      <a:solidFill>
+                        <a:srgbClr val="CBD5E1"/>
+                      </a:solidFill>
+                    </a:lnT>
+                    <a:lnB w="6350">
+                      <a:solidFill>
+                        <a:srgbClr val="CBD5E1"/>
+                      </a:solidFill>
+                    </a:lnB>
+                    <a:solidFill>
+                      <a:srgbClr val="F1F5F9"/>
+                    </a:solidFill>
+                  </a:tcPr>
+                </a:tc>
+                <a:tc>
+                  <a:txBody>
+                    <a:bodyPr/>
+                    <a:lstStyle/>
+                    <a:p>
+                      <a:pPr algn="l"/>
+                      <a:r>
+                        <a:rPr lang="ja-JP" sz="950" b="0" i="0">
+                          <a:solidFill>
+                            <a:srgbClr val="2D3748"/>
+                          </a:solidFill>
+                        </a:rPr>
+                        <a:t>コード変更に合わせ README / API 仕様を更新</a:t>
+                      </a:r>
+                    </a:p>
+                  </a:txBody>
+                  <a:tcPr marL="73152" marR="73152" marT="16000" marB="16000" anchor="ctr">
+                    <a:lnL w="6350">
+                      <a:solidFill>
+                        <a:srgbClr val="CBD5E1"/>
+                      </a:solidFill>
+                    </a:lnL>
+                    <a:lnR w="6350">
+                      <a:solidFill>
+                        <a:srgbClr val="CBD5E1"/>
+                      </a:solidFill>
+                    </a:lnR>
+                    <a:lnT w="6350">
+                      <a:solidFill>
+                        <a:srgbClr val="CBD5E1"/>
+                      </a:solidFill>
+                    </a:lnT>
+                    <a:lnB w="6350">
+                      <a:solidFill>
+                        <a:srgbClr val="CBD5E1"/>
+                      </a:solidFill>
+                    </a:lnB>
+                    <a:solidFill>
+                      <a:srgbClr val="F1F5F9"/>
+                    </a:solidFill>
+                  </a:tcPr>
+                </a:tc>
+                <a:tc>
+                  <a:txBody>
+                    <a:bodyPr/>
+                    <a:lstStyle/>
+                    <a:p>
+                      <a:pPr algn="l"/>
+                      <a:r>
+                        <a:rPr lang="ja-JP" sz="950" b="0" i="0">
+                          <a:solidFill>
+                            <a:srgbClr val="2D3748"/>
+                          </a:solidFill>
+                        </a:rPr>
+                        <a:t>レビューと並行しドリフト防止</a:t>
+                      </a:r>
+                    </a:p>
+                  </a:txBody>
+                  <a:tcPr marL="73152" marR="73152" marT="16000" marB="16000" anchor="ctr">
+                    <a:lnL w="6350">
+                      <a:solidFill>
+                        <a:srgbClr val="CBD5E1"/>
+                      </a:solidFill>
+                    </a:lnL>
+                    <a:lnR w="6350">
+                      <a:solidFill>
+                        <a:srgbClr val="CBD5E1"/>
+                      </a:solidFill>
+                    </a:lnR>
+                    <a:lnT w="6350">
+                      <a:solidFill>
+                        <a:srgbClr val="CBD5E1"/>
+                      </a:solidFill>
+                    </a:lnT>
+                    <a:lnB w="6350">
+                      <a:solidFill>
+                        <a:srgbClr val="CBD5E1"/>
+                      </a:solidFill>
+                    </a:lnB>
+                    <a:solidFill>
+                      <a:srgbClr val="F1F5F9"/>
+                    </a:solidFill>
+                  </a:tcPr>
+                </a:tc>
+              </a:tr>
+              <a:tr h="350000">
+                <a:tc>
+                  <a:txBody>
+                    <a:bodyPr/>
+                    <a:lstStyle/>
+                    <a:p>
+                      <a:pPr algn="l"/>
+                      <a:r>
+                        <a:rPr lang="ja-JP" sz="950" b="1" i="0">
+                          <a:solidFill>
+                            <a:srgbClr val="1E2761"/>
+                          </a:solidFill>
+                        </a:rPr>
+                        <a:t>依存アップグレード検証</a:t>
+                      </a:r>
+                    </a:p>
+                  </a:txBody>
+                  <a:tcPr marL="73152" marR="73152" marT="16000" marB="16000" anchor="ctr">
+                    <a:lnL w="6350">
+                      <a:solidFill>
+                        <a:srgbClr val="CBD5E1"/>
+                      </a:solidFill>
+                    </a:lnL>
+                    <a:lnR w="6350">
+                      <a:solidFill>
+                        <a:srgbClr val="CBD5E1"/>
+                      </a:solidFill>
+                    </a:lnR>
+                    <a:lnT w="6350">
+                      <a:solidFill>
+                        <a:srgbClr val="CBD5E1"/>
+                      </a:solidFill>
+                    </a:lnT>
+                    <a:lnB w="6350">
+                      <a:solidFill>
+                        <a:srgbClr val="CBD5E1"/>
+                      </a:solidFill>
+                    </a:lnB>
+                    <a:solidFill>
+                      <a:srgbClr val="FFFFFF"/>
+                    </a:solidFill>
+                  </a:tcPr>
+                </a:tc>
+                <a:tc>
+                  <a:txBody>
+                    <a:bodyPr/>
+                    <a:lstStyle/>
+                    <a:p>
+                      <a:pPr algn="l"/>
+                      <a:r>
+                        <a:rPr lang="ja-JP" sz="950" b="0" i="0">
+                          <a:solidFill>
+                            <a:srgbClr val="2D3748"/>
+                          </a:solidFill>
+                        </a:rPr>
+                        <a:t>依存ごとに breaking change を調査し可否を報告</a:t>
+                      </a:r>
+                    </a:p>
+                  </a:txBody>
+                  <a:tcPr marL="73152" marR="73152" marT="16000" marB="16000" anchor="ctr">
+                    <a:lnL w="6350">
+                      <a:solidFill>
+                        <a:srgbClr val="CBD5E1"/>
+                      </a:solidFill>
+                    </a:lnL>
+                    <a:lnR w="6350">
+                      <a:solidFill>
+                        <a:srgbClr val="CBD5E1"/>
+                      </a:solidFill>
+                    </a:lnR>
+                    <a:lnT w="6350">
+                      <a:solidFill>
+                        <a:srgbClr val="CBD5E1"/>
+                      </a:solidFill>
+                    </a:lnT>
+                    <a:lnB w="6350">
+                      <a:solidFill>
+                        <a:srgbClr val="CBD5E1"/>
+                      </a:solidFill>
+                    </a:lnB>
+                    <a:solidFill>
+                      <a:srgbClr val="FFFFFF"/>
+                    </a:solidFill>
+                  </a:tcPr>
+                </a:tc>
+                <a:tc>
+                  <a:txBody>
+                    <a:bodyPr/>
+                    <a:lstStyle/>
+                    <a:p>
+                      <a:pPr algn="l"/>
+                      <a:r>
+                        <a:rPr lang="ja-JP" sz="950" b="0" i="0">
+                          <a:solidFill>
+                            <a:srgbClr val="2D3748"/>
+                          </a:solidFill>
+                        </a:rPr>
+                        <a:t>安全なバージョン更新</a:t>
+                      </a:r>
+                    </a:p>
+                  </a:txBody>
+                  <a:tcPr marL="73152" marR="73152" marT="16000" marB="16000" anchor="ctr">
+                    <a:lnL w="6350">
+                      <a:solidFill>
+                        <a:srgbClr val="CBD5E1"/>
+                      </a:solidFill>
+                    </a:lnL>
+                    <a:lnR w="6350">
+                      <a:solidFill>
+                        <a:srgbClr val="CBD5E1"/>
+                      </a:solidFill>
+                    </a:lnR>
+                    <a:lnT w="6350">
+                      <a:solidFill>
+                        <a:srgbClr val="CBD5E1"/>
+                      </a:solidFill>
+                    </a:lnT>
+                    <a:lnB w="6350">
+                      <a:solidFill>
+                        <a:srgbClr val="CBD5E1"/>
+                      </a:solidFill>
+                    </a:lnB>
+                    <a:solidFill>
+                      <a:srgbClr val="FFFFFF"/>
+                    </a:solidFill>
+                  </a:tcPr>
+                </a:tc>
+              </a:tr>
+            </a:tbl>
+          </a:graphicData>
+        </a:graphic>
+      </p:graphicFrame>
+      <p:sp>
+        <p:nvSpPr>
+          <p:cNvPr id="30" name="dots"/>
+          <p:cNvSpPr txBox="1"/>
+          <p:nvPr/>
+        </p:nvSpPr>
+        <p:spPr>
+          <a:xfrm>
+            <a:off x="5486400" y="4828032"/>
+            <a:ext cx="3474720" cy="228600"/>
+          </a:xfrm>
+          <a:prstGeom prst="rect">
+            <a:avLst/>
+          </a:prstGeom>
+          <a:noFill/>
+        </p:spPr>
+        <p:txBody>
+          <a:bodyPr wrap="square" lIns="0" rIns="0" tIns="0" bIns="0">
+            <a:spAutoFit/>
+          </a:bodyPr>
+          <a:lstStyle/>
+          <a:p>
+            <a:r>
+              <a:rPr lang="ja-JP" sz="1000" b="0" i="0">
+                <a:solidFill>
+                  <a:srgbClr val="64748B"/>
+                </a:solidFill>
+              </a:rPr>
+              <a:t>● ● ● ● ● ● ● ○ ○ ○ ○</a:t>
             </a:r>
           </a:p>
         </p:txBody>
@@ -2849,7 +5764,7 @@
                   <a:srgbClr val="64748B"/>
                 </a:solidFill>
               </a:rPr>
-              <a:t>● ● ● ● ● ● ● ○ ○ ○</a:t>
+              <a:t>● ● ● ● ● ● ● ○ ○ ○ ○</a:t>
             </a:r>
           </a:p>
         </p:txBody>
@@ -3209,7 +6124,7 @@
                   <a:srgbClr val="64748B"/>
                 </a:solidFill>
               </a:rPr>
-              <a:t>● ● ● ● ● ● ● ○ ○ ○</a:t>
+              <a:t>● ● ● ● ● ● ● ○ ○ ○ ○</a:t>
             </a:r>
           </a:p>
         </p:txBody>
@@ -3571,7 +6486,7 @@
                   <a:srgbClr val="64748B"/>
                 </a:solidFill>
               </a:rPr>
-              <a:t>● ● ● ● ● ● ● ○ ○ ○</a:t>
+              <a:t>● ● ● ● ● ● ● ○ ○ ○ ○</a:t>
             </a:r>
           </a:p>
         </p:txBody>
@@ -3961,7 +6876,7 @@
                   <a:srgbClr val="64748B"/>
                 </a:solidFill>
               </a:rPr>
-              <a:t>● ● ● ● ● ● ● ○ ○ ○</a:t>
+              <a:t>● ● ● ● ● ● ● ○ ○ ○ ○</a:t>
             </a:r>
           </a:p>
         </p:txBody>
@@ -4331,7 +7246,7 @@
                   <a:srgbClr val="64748B"/>
                 </a:solidFill>
               </a:rPr>
-              <a:t>● ● ● ● ● ● ● ○ ○ ○</a:t>
+              <a:t>● ● ● ● ● ● ● ○ ○ ○ ○</a:t>
             </a:r>
           </a:p>
         </p:txBody>
@@ -4612,7 +7527,7 @@
                   <a:srgbClr val="64748B"/>
                 </a:solidFill>
               </a:rPr>
-              <a:t>● ● ● ● ● ● ● ○ ○ ○</a:t>
+              <a:t>● ● ● ● ● ● ● ○ ○ ○ ○</a:t>
             </a:r>
           </a:p>
         </p:txBody>
@@ -4974,7 +7889,7 @@
                   <a:srgbClr val="64748B"/>
                 </a:solidFill>
               </a:rPr>
-              <a:t>→ 詳細は GitHub anthropics/skills と FAQ Q2-1 を参照（本編では深追いしない）</a:t>
+              <a:t>→ 全8型の一覧と金融ドメインのユースケースは、次ページからの表で整理</a:t>
             </a:r>
           </a:p>
         </p:txBody>
@@ -5040,7 +7955,7 @@
                   <a:srgbClr val="64748B"/>
                 </a:solidFill>
               </a:rPr>
-              <a:t>● ● ● ● ● ● ● ○ ○ ○</a:t>
+              <a:t>● ● ● ● ● ● ● ○ ○ ○ ○</a:t>
             </a:r>
           </a:p>
         </p:txBody>
@@ -5073,7 +7988,7 @@
       <p:grpSpPr/>
       <p:sp>
         <p:nvSpPr>
-          <p:cNvPr id="2" name="TextBox 1"/>
+          <p:cNvPr id="2" name="title"/>
           <p:cNvSpPr txBox="1"/>
           <p:nvPr/>
         </p:nvSpPr>
@@ -5094,7 +8009,7 @@
           <a:lstStyle/>
           <a:p>
             <a:r>
-              <a:rPr sz="2400" b="1" i="0">
+              <a:rPr lang="ja-JP" sz="2400" b="1" i="0">
                 <a:solidFill>
                   <a:srgbClr val="1E2761"/>
                 </a:solidFill>
@@ -5106,7 +8021,7 @@
       </p:sp>
       <p:sp>
         <p:nvSpPr>
-          <p:cNvPr id="3" name="TextBox 2"/>
+          <p:cNvPr id="3" name="sub"/>
           <p:cNvSpPr txBox="1"/>
           <p:nvPr/>
         </p:nvSpPr>
@@ -5127,7 +8042,7 @@
           <a:lstStyle/>
           <a:p>
             <a:r>
-              <a:rPr sz="1300" b="0" i="1">
+              <a:rPr lang="ja-JP" sz="1300" b="0" i="1">
                 <a:solidFill>
                   <a:srgbClr val="64748B"/>
                 </a:solidFill>
@@ -5139,81 +8054,91 @@
       </p:sp>
       <p:sp>
         <p:nvSpPr>
-          <p:cNvPr id="4" name="TextBox 3"/>
+          <p:cNvPr id="4" name="lhead"/>
           <p:cNvSpPr txBox="1"/>
           <p:nvPr/>
         </p:nvSpPr>
         <p:spPr>
           <a:xfrm>
             <a:off x="457200" y="1450000"/>
-            <a:ext cx="4100000" cy="320000"/>
-          </a:xfrm>
-          <a:prstGeom prst="rect">
-            <a:avLst/>
-          </a:prstGeom>
-          <a:noFill/>
-        </p:spPr>
-        <p:txBody>
-          <a:bodyPr wrap="square" lIns="0" rIns="0" tIns="0" bIns="0">
-            <a:spAutoFit/>
-          </a:bodyPr>
-          <a:lstStyle/>
-          <a:p>
-            <a:r>
-              <a:rPr sz="1400" b="1" i="0">
+            <a:ext cx="4150000" cy="320000"/>
+          </a:xfrm>
+          <a:prstGeom prst="rect">
+            <a:avLst/>
+          </a:prstGeom>
+          <a:noFill/>
+        </p:spPr>
+        <p:txBody>
+          <a:bodyPr wrap="square" lIns="0" rIns="0" tIns="0" bIns="0">
+            <a:spAutoFit/>
+          </a:bodyPr>
+          <a:lstStyle/>
+          <a:p>
+            <a:r>
+              <a:rPr lang="ja-JP" sz="1400" b="1" i="0">
                 <a:solidFill>
                   <a:srgbClr val="1E2761"/>
                 </a:solidFill>
               </a:rPr>
-              <a:t>SubAgents（第4回の延長）</a:t>
-            </a:r>
-          </a:p>
-        </p:txBody>
-      </p:sp>
-      <p:sp>
-        <p:nvSpPr>
-          <p:cNvPr id="5" name="TextBox 4"/>
+              <a:t>SubAgents ― 並列の専門役</a:t>
+            </a:r>
+          </a:p>
+        </p:txBody>
+      </p:sp>
+      <p:sp>
+        <p:nvSpPr>
+          <p:cNvPr id="5" name="subagents"/>
           <p:cNvSpPr txBox="1"/>
           <p:nvPr/>
         </p:nvSpPr>
         <p:spPr>
           <a:xfrm>
             <a:off x="457200" y="1830000"/>
-            <a:ext cx="4100000" cy="2400000"/>
-          </a:xfrm>
-          <a:prstGeom prst="rect">
-            <a:avLst/>
-          </a:prstGeom>
-          <a:noFill/>
-        </p:spPr>
-        <p:txBody>
-          <a:bodyPr wrap="square" lIns="0" rIns="0" tIns="0" bIns="0">
-            <a:spAutoFit/>
-          </a:bodyPr>
-          <a:lstStyle/>
-          <a:p>
-            <a:r>
-              <a:rPr sz="1200" b="0">
+            <a:ext cx="4150000" cy="2400000"/>
+          </a:xfrm>
+          <a:prstGeom prst="rect">
+            <a:avLst/>
+          </a:prstGeom>
+          <a:noFill/>
+        </p:spPr>
+        <p:txBody>
+          <a:bodyPr wrap="square" lIns="0" rIns="0" tIns="0" bIns="0">
+            <a:spAutoFit/>
+          </a:bodyPr>
+          <a:lstStyle/>
+          <a:p>
+            <a:r>
+              <a:rPr lang="ja-JP" sz="1050" b="0" i="0">
                 <a:solidFill>
                   <a:srgbClr val="2D3748"/>
                 </a:solidFill>
               </a:rPr>
-              <a:t>各SubAgent は独立コンテキストで動作</a:t>
-            </a:r>
-          </a:p>
-          <a:p>
-            <a:r>
-              <a:rPr sz="1200" b="0">
+              <a:t>各 SubAgent は独立コンテキストで動作</a:t>
+            </a:r>
+          </a:p>
+          <a:p>
+            <a:r>
+              <a:rPr lang="ja-JP" sz="1050" b="0" i="0">
                 <a:solidFill>
                   <a:srgbClr val="2D3748"/>
                 </a:solidFill>
               </a:rPr>
-              <a:t>Main Agent に結果を報告のみ（相互通信なし）</a:t>
-            </a:r>
-          </a:p>
-          <a:p>
-            <a:r>
-              <a:rPr sz="800" b="0">
+              <a:t>結果のみ Main Agent に報告（相互通信なし）</a:t>
+            </a:r>
+          </a:p>
+          <a:p>
+            <a:r>
+              <a:rPr lang="ja-JP" sz="1050" b="0" i="0">
+                <a:solidFill>
+                  <a:srgbClr val="64748B"/>
+                </a:solidFill>
+              </a:rPr>
+              <a:t>典型例: レビュー / テスト生成 / ドキュメント更新</a:t>
+            </a:r>
+          </a:p>
+          <a:p>
+            <a:r>
+              <a:rPr lang="ja-JP" sz="500" b="0" i="0">
                 <a:solidFill>
                   <a:srgbClr val="2D3748"/>
                 </a:solidFill>
@@ -5223,49 +8148,59 @@
           </a:p>
           <a:p>
             <a:r>
-              <a:rPr sz="1200" b="1">
+              <a:rPr lang="ja-JP" sz="1100" b="1" i="0">
                 <a:solidFill>
                   <a:srgbClr val="1E2761"/>
                 </a:solidFill>
               </a:rPr>
-              <a:t>典型的な3役割:</a:t>
-            </a:r>
-          </a:p>
-          <a:p>
-            <a:r>
-              <a:rPr sz="1200" b="0">
+              <a:t>呼び出し方:</a:t>
+            </a:r>
+          </a:p>
+          <a:p>
+            <a:r>
+              <a:rPr lang="ja-JP" sz="1050" b="0" i="0">
                 <a:solidFill>
                   <a:srgbClr val="64748B"/>
                 </a:solidFill>
               </a:rPr>
-              <a:t>●  セキュリティレビュー（Read-only）</a:t>
-            </a:r>
-          </a:p>
-          <a:p>
-            <a:r>
-              <a:rPr sz="1200" b="0">
+              <a:t>●  定義: .claude/agents/&lt;名前&gt;.md</a:t>
+            </a:r>
+          </a:p>
+          <a:p>
+            <a:r>
+              <a:rPr lang="ja-JP" sz="1050" b="0" i="0">
                 <a:solidFill>
                   <a:srgbClr val="64748B"/>
                 </a:solidFill>
               </a:rPr>
-              <a:t>●  テスト生成 + 実行</a:t>
-            </a:r>
-          </a:p>
-          <a:p>
-            <a:r>
-              <a:rPr sz="1200" b="0">
+              <a:t>●  自動委任: description を読んで Claude が判断</a:t>
+            </a:r>
+          </a:p>
+          <a:p>
+            <a:r>
+              <a:rPr lang="ja-JP" sz="1050" b="0" i="0">
                 <a:solidFill>
                   <a:srgbClr val="64748B"/>
                 </a:solidFill>
               </a:rPr>
-              <a:t>●  ドキュメント更新</a:t>
-            </a:r>
-          </a:p>
-        </p:txBody>
-      </p:sp>
-      <p:sp>
-        <p:nvSpPr>
-          <p:cNvPr id="6" name="TextBox 5"/>
+              <a:t>●  明示指定:「○○ サブエージェントで」/ @名前</a:t>
+            </a:r>
+          </a:p>
+          <a:p>
+            <a:r>
+              <a:rPr lang="ja-JP" sz="1050" b="0" i="0">
+                <a:solidFill>
+                  <a:srgbClr val="64748B"/>
+                </a:solidFill>
+              </a:rPr>
+              <a:t>●  Skill 経由: context: fork ＋ agent: で起動</a:t>
+            </a:r>
+          </a:p>
+        </p:txBody>
+      </p:sp>
+      <p:sp>
+        <p:nvSpPr>
+          <p:cNvPr id="6" name="rhead"/>
           <p:cNvSpPr txBox="1"/>
           <p:nvPr/>
         </p:nvSpPr>
@@ -5286,19 +8221,19 @@
           <a:lstStyle/>
           <a:p>
             <a:r>
-              <a:rPr sz="1400" b="1" i="0">
+              <a:rPr lang="ja-JP" sz="1400" b="1" i="0">
                 <a:solidFill>
                   <a:srgbClr val="1E2761"/>
                 </a:solidFill>
               </a:rPr>
-              <a:t>Routines（研究プレビュー）</a:t>
-            </a:r>
-          </a:p>
-        </p:txBody>
-      </p:sp>
-      <p:sp>
-        <p:nvSpPr>
-          <p:cNvPr id="7" name="TextBox 6"/>
+              <a:t>自律実行 ― 人がいなくても動く</a:t>
+            </a:r>
+          </a:p>
+        </p:txBody>
+      </p:sp>
+      <p:sp>
+        <p:nvSpPr>
+          <p:cNvPr id="7" name="routines"/>
           <p:cNvSpPr txBox="1"/>
           <p:nvPr/>
         </p:nvSpPr>
@@ -5319,17 +8254,17 @@
           <a:lstStyle/>
           <a:p>
             <a:r>
-              <a:rPr sz="1200" b="0">
+              <a:rPr lang="ja-JP" sz="1050" b="0" i="0">
                 <a:solidFill>
                   <a:srgbClr val="2D3748"/>
                 </a:solidFill>
               </a:rPr>
-              <a:t>プロンプト + リポジトリ + コネクタを保存して自動実行</a:t>
-            </a:r>
-          </a:p>
-          <a:p>
-            <a:r>
-              <a:rPr sz="800" b="0">
+              <a:t>保存して自動実行（プロンプト＋リポジトリ＋コネクタ）</a:t>
+            </a:r>
+          </a:p>
+          <a:p>
+            <a:r>
+              <a:rPr lang="ja-JP" sz="500" b="0" i="0">
                 <a:solidFill>
                   <a:srgbClr val="2D3748"/>
                 </a:solidFill>
@@ -5339,92 +8274,204 @@
           </a:p>
           <a:p>
             <a:r>
-              <a:rPr sz="1200" b="1">
+              <a:rPr lang="ja-JP" sz="1100" b="1" i="0">
                 <a:solidFill>
                   <a:srgbClr val="1E2761"/>
                 </a:solidFill>
               </a:rPr>
-              <a:t>3つのトリガー:</a:t>
-            </a:r>
-          </a:p>
-          <a:p>
-            <a:r>
-              <a:rPr sz="1200" b="0">
+              <a:t>① Routines（クラウド・研究プレビュー）</a:t>
+            </a:r>
+          </a:p>
+          <a:p>
+            <a:r>
+              <a:rPr lang="ja-JP" sz="1050" b="0" i="0">
                 <a:solidFill>
                   <a:srgbClr val="64748B"/>
                 </a:solidFill>
               </a:rPr>
-              <a:t>●  スケジュール（毎日9時 / 毎週月曜）</a:t>
-            </a:r>
-          </a:p>
-          <a:p>
-            <a:r>
-              <a:rPr sz="1200" b="0">
+              <a:t>●  スケジュール / API / Git イベントで起動</a:t>
+            </a:r>
+          </a:p>
+          <a:p>
+            <a:r>
+              <a:rPr lang="ja-JP" sz="1050" b="0" i="0">
                 <a:solidFill>
                   <a:srgbClr val="64748B"/>
                 </a:solidFill>
               </a:rPr>
-              <a:t>●  API（HTTPでオンデマンド実行）</a:t>
-            </a:r>
-          </a:p>
-          <a:p>
-            <a:r>
-              <a:rPr sz="1200" b="0">
+              <a:t>●  Anthropic クラウドで実行（PC を閉じても動く）</a:t>
+            </a:r>
+          </a:p>
+          <a:p>
+            <a:r>
+              <a:rPr lang="ja-JP" sz="500" b="0" i="0">
+                <a:solidFill>
+                  <a:srgbClr val="2D3748"/>
+                </a:solidFill>
+              </a:rPr>
+              <a:t/>
+            </a:r>
+          </a:p>
+          <a:p>
+            <a:r>
+              <a:rPr lang="ja-JP" sz="1100" b="1" i="0">
+                <a:solidFill>
+                  <a:srgbClr val="1E2761"/>
+                </a:solidFill>
+              </a:rPr>
+              <a:t>② cron（ローカル / Windows）</a:t>
+            </a:r>
+          </a:p>
+          <a:p>
+            <a:r>
+              <a:rPr lang="ja-JP" sz="1050" b="0" i="0">
                 <a:solidFill>
                   <a:srgbClr val="64748B"/>
                 </a:solidFill>
               </a:rPr>
-              <a:t>●  GitLab/GitHubイベント（MR作成等）</a:t>
-            </a:r>
-          </a:p>
-          <a:p>
-            <a:r>
-              <a:rPr sz="1200" b="0">
-                <a:solidFill>
-                  <a:srgbClr val="2D3748"/>
-                </a:solidFill>
-              </a:rPr>
-              <a:t>Anthropicクラウド上で実行 → ノートPCを閉じても動く</a:t>
-            </a:r>
-          </a:p>
-        </p:txBody>
-      </p:sp>
-      <p:sp>
-        <p:nvSpPr>
-          <p:cNvPr id="8" name="TextBox 7"/>
-          <p:cNvSpPr txBox="1"/>
-          <p:nvPr/>
-        </p:nvSpPr>
-        <p:spPr>
-          <a:xfrm>
-            <a:off x="457200" y="4250000"/>
-            <a:ext cx="8229600" cy="380000"/>
-          </a:xfrm>
-          <a:prstGeom prst="rect">
-            <a:avLst/>
-          </a:prstGeom>
-          <a:noFill/>
-        </p:spPr>
-        <p:txBody>
-          <a:bodyPr wrap="square" lIns="0" rIns="0" tIns="0" bIns="0">
-            <a:spAutoFit/>
-          </a:bodyPr>
-          <a:lstStyle/>
-          <a:p>
-            <a:r>
-              <a:rPr sz="1200" b="0" i="1">
+              <a:t>●  WSL2 の cron / タスクスケジューラ で起動</a:t>
+            </a:r>
+          </a:p>
+          <a:p>
+            <a:r>
+              <a:rPr lang="ja-JP" sz="1050" b="0" i="0">
+                <a:solidFill>
+                  <a:srgbClr val="64748B"/>
+                </a:solidFill>
+              </a:rPr>
+              <a:t>●  claude -p を定期実行・再起動後も継続</a:t>
+            </a:r>
+          </a:p>
+        </p:txBody>
+      </p:sp>
+      <p:sp>
+        <p:nvSpPr>
+          <p:cNvPr id="11" name="doclinks"/>
+          <p:cNvSpPr txBox="1"/>
+          <p:nvPr/>
+        </p:nvSpPr>
+        <p:spPr>
+          <a:xfrm>
+            <a:off x="457200" y="3500000"/>
+            <a:ext cx="8229600" cy="280000"/>
+          </a:xfrm>
+          <a:prstGeom prst="rect">
+            <a:avLst/>
+          </a:prstGeom>
+          <a:noFill/>
+        </p:spPr>
+        <p:txBody>
+          <a:bodyPr wrap="square" lIns="0" rIns="0" tIns="0" bIns="0">
+            <a:spAutoFit/>
+          </a:bodyPr>
+          <a:lstStyle/>
+          <a:p>
+            <a:r>
+              <a:rPr lang="ja-JP" sz="950" b="1" i="0">
                 <a:solidFill>
                   <a:srgbClr val="1E2761"/>
                 </a:solidFill>
               </a:rPr>
-              <a:t>→ SubAgents は「セッション内の並列」、Routines は「セッションを超えた自律」</a:t>
-            </a:r>
-          </a:p>
-        </p:txBody>
-      </p:sp>
-      <p:sp>
-        <p:nvSpPr>
-          <p:cNvPr id="9" name="TextBox 8"/>
+              <a:t xml:space="preserve">公式ドキュメント ▸ </a:t>
+            </a:r>
+            <a:r>
+              <a:rPr lang="en-US" sz="950" b="0" i="0" u="sng">
+                <a:solidFill>
+                  <a:srgbClr val="1C7293"/>
+                </a:solidFill>
+                <a:hlinkClick r:id="rId2"/>
+              </a:rPr>
+              <a:t>code.claude.com/docs/en/sub-agents</a:t>
+            </a:r>
+            <a:r>
+              <a:rPr lang="ja-JP" sz="950" b="0" i="0">
+                <a:solidFill>
+                  <a:srgbClr val="64748B"/>
+                </a:solidFill>
+              </a:rPr>
+              <a:t>　・　</a:t>
+            </a:r>
+            <a:r>
+              <a:rPr lang="en-US" sz="950" b="0" i="0" u="sng">
+                <a:solidFill>
+                  <a:srgbClr val="1C7293"/>
+                </a:solidFill>
+                <a:hlinkClick r:id="rId3"/>
+              </a:rPr>
+              <a:t>code.claude.com/docs/en/headless</a:t>
+            </a:r>
+          </a:p>
+        </p:txBody>
+      </p:sp>
+      <p:sp>
+        <p:nvSpPr>
+          <p:cNvPr id="8" name="warn"/>
+          <p:cNvSpPr txBox="1"/>
+          <p:nvPr/>
+        </p:nvSpPr>
+        <p:spPr>
+          <a:xfrm>
+            <a:off x="457200" y="3900000"/>
+            <a:ext cx="8229600" cy="300000"/>
+          </a:xfrm>
+          <a:prstGeom prst="rect">
+            <a:avLst/>
+          </a:prstGeom>
+          <a:noFill/>
+        </p:spPr>
+        <p:txBody>
+          <a:bodyPr wrap="square" lIns="0" rIns="0" tIns="0" bIns="0">
+            <a:spAutoFit/>
+          </a:bodyPr>
+          <a:lstStyle/>
+          <a:p>
+            <a:r>
+              <a:rPr lang="ja-JP" sz="1050" b="1" i="0">
+                <a:solidFill>
+                  <a:srgbClr val="C2410C"/>
+                </a:solidFill>
+              </a:rPr>
+              <a:t>⚠ ヘッドレス（claude -p）はトークン従量課金でコスト発生 → --max-turns / --max-budget-usd で上限設定</a:t>
+            </a:r>
+          </a:p>
+        </p:txBody>
+      </p:sp>
+      <p:sp>
+        <p:nvSpPr>
+          <p:cNvPr id="9" name="take"/>
+          <p:cNvSpPr txBox="1"/>
+          <p:nvPr/>
+        </p:nvSpPr>
+        <p:spPr>
+          <a:xfrm>
+            <a:off x="457200" y="4320000"/>
+            <a:ext cx="8229600" cy="360000"/>
+          </a:xfrm>
+          <a:prstGeom prst="rect">
+            <a:avLst/>
+          </a:prstGeom>
+          <a:noFill/>
+        </p:spPr>
+        <p:txBody>
+          <a:bodyPr wrap="square" lIns="0" rIns="0" tIns="0" bIns="0">
+            <a:spAutoFit/>
+          </a:bodyPr>
+          <a:lstStyle/>
+          <a:p>
+            <a:r>
+              <a:rPr lang="ja-JP" sz="1200" b="0" i="1">
+                <a:solidFill>
+                  <a:srgbClr val="1E2761"/>
+                </a:solidFill>
+              </a:rPr>
+              <a:t>→ SubAgents は「セッション内の並列」、Routines / cron は「セッションを超えた自律」</a:t>
+            </a:r>
+          </a:p>
+        </p:txBody>
+      </p:sp>
+      <p:sp>
+        <p:nvSpPr>
+          <p:cNvPr id="10" name="dots"/>
           <p:cNvSpPr txBox="1"/>
           <p:nvPr/>
         </p:nvSpPr>
@@ -5445,12 +8492,12 @@
           <a:lstStyle/>
           <a:p>
             <a:r>
-              <a:rPr sz="1000" b="0" i="0">
+              <a:rPr lang="ja-JP" sz="1000" b="0" i="0">
                 <a:solidFill>
                   <a:srgbClr val="64748B"/>
                 </a:solidFill>
               </a:rPr>
-              <a:t>● ● ● ● ● ● ● ○ ○ ○</a:t>
+              <a:t>● ● ● ● ● ● ● ○ ○ ○ ○</a:t>
             </a:r>
           </a:p>
         </p:txBody>
